--- a/pptx_src/Certificate.pptx
+++ b/pptx_src/Certificate.pptx
@@ -5,13 +5,20 @@
     <p:sldMasterId id="2147483648" r:id="rId1"/>
   </p:sldMasterIdLst>
   <p:notesMasterIdLst>
-    <p:notesMasterId r:id="rId3"/>
+    <p:notesMasterId r:id="rId4"/>
   </p:notesMasterIdLst>
   <p:sldIdLst>
     <p:sldId id="257" r:id="rId2"/>
+    <p:sldId id="258" r:id="rId3"/>
   </p:sldIdLst>
   <p:sldSz cx="9906000" cy="6858000" type="A4"/>
   <p:notesSz cx="6858000" cy="9144000"/>
+  <p:embeddedFontLst>
+    <p:embeddedFont>
+      <p:font typeface="Slight" panose="00000500000000000000" pitchFamily="2" charset="0"/>
+      <p:regular r:id="rId5"/>
+    </p:embeddedFont>
+  </p:embeddedFontLst>
   <p:defaultTextStyle>
     <a:defPPr>
       <a:defRPr lang="en-US"/>
@@ -208,7 +215,7 @@
           <a:p>
             <a:fld id="{5D2A3E32-B134-42CF-BF99-9DCA3D02EB99}" type="datetimeFigureOut">
               <a:rPr lang="en-US" smtClean="0"/>
-              <a:t>11/12/2025</a:t>
+              <a:t>11/16/2025</a:t>
             </a:fld>
             <a:endParaRPr lang="en-US"/>
           </a:p>
@@ -655,7 +662,7 @@
             <a:fld id="{1D8BD707-D9CF-40AE-B4C6-C98DA3205C09}" type="datetimeFigureOut">
               <a:rPr lang="en-US" smtClean="0"/>
               <a:pPr/>
-              <a:t>11/12/2025</a:t>
+              <a:t>11/16/2025</a:t>
             </a:fld>
             <a:endParaRPr lang="en-US"/>
           </a:p>
@@ -820,7 +827,7 @@
             <a:fld id="{1D8BD707-D9CF-40AE-B4C6-C98DA3205C09}" type="datetimeFigureOut">
               <a:rPr lang="en-US" smtClean="0"/>
               <a:pPr/>
-              <a:t>11/12/2025</a:t>
+              <a:t>11/16/2025</a:t>
             </a:fld>
             <a:endParaRPr lang="en-US"/>
           </a:p>
@@ -995,7 +1002,7 @@
             <a:fld id="{1D8BD707-D9CF-40AE-B4C6-C98DA3205C09}" type="datetimeFigureOut">
               <a:rPr lang="en-US" smtClean="0"/>
               <a:pPr/>
-              <a:t>11/12/2025</a:t>
+              <a:t>11/16/2025</a:t>
             </a:fld>
             <a:endParaRPr lang="en-US"/>
           </a:p>
@@ -1160,7 +1167,7 @@
             <a:fld id="{1D8BD707-D9CF-40AE-B4C6-C98DA3205C09}" type="datetimeFigureOut">
               <a:rPr lang="en-US" smtClean="0"/>
               <a:pPr/>
-              <a:t>11/12/2025</a:t>
+              <a:t>11/16/2025</a:t>
             </a:fld>
             <a:endParaRPr lang="en-US"/>
           </a:p>
@@ -1402,7 +1409,7 @@
             <a:fld id="{1D8BD707-D9CF-40AE-B4C6-C98DA3205C09}" type="datetimeFigureOut">
               <a:rPr lang="en-US" smtClean="0"/>
               <a:pPr/>
-              <a:t>11/12/2025</a:t>
+              <a:t>11/16/2025</a:t>
             </a:fld>
             <a:endParaRPr lang="en-US"/>
           </a:p>
@@ -1684,7 +1691,7 @@
             <a:fld id="{1D8BD707-D9CF-40AE-B4C6-C98DA3205C09}" type="datetimeFigureOut">
               <a:rPr lang="en-US" smtClean="0"/>
               <a:pPr/>
-              <a:t>11/12/2025</a:t>
+              <a:t>11/16/2025</a:t>
             </a:fld>
             <a:endParaRPr lang="en-US"/>
           </a:p>
@@ -2100,7 +2107,7 @@
             <a:fld id="{1D8BD707-D9CF-40AE-B4C6-C98DA3205C09}" type="datetimeFigureOut">
               <a:rPr lang="en-US" smtClean="0"/>
               <a:pPr/>
-              <a:t>11/12/2025</a:t>
+              <a:t>11/16/2025</a:t>
             </a:fld>
             <a:endParaRPr lang="en-US"/>
           </a:p>
@@ -2214,7 +2221,7 @@
             <a:fld id="{1D8BD707-D9CF-40AE-B4C6-C98DA3205C09}" type="datetimeFigureOut">
               <a:rPr lang="en-US" smtClean="0"/>
               <a:pPr/>
-              <a:t>11/12/2025</a:t>
+              <a:t>11/16/2025</a:t>
             </a:fld>
             <a:endParaRPr lang="en-US"/>
           </a:p>
@@ -2306,7 +2313,7 @@
             <a:fld id="{1D8BD707-D9CF-40AE-B4C6-C98DA3205C09}" type="datetimeFigureOut">
               <a:rPr lang="en-US" smtClean="0"/>
               <a:pPr/>
-              <a:t>11/12/2025</a:t>
+              <a:t>11/16/2025</a:t>
             </a:fld>
             <a:endParaRPr lang="en-US"/>
           </a:p>
@@ -2578,7 +2585,7 @@
             <a:fld id="{1D8BD707-D9CF-40AE-B4C6-C98DA3205C09}" type="datetimeFigureOut">
               <a:rPr lang="en-US" smtClean="0"/>
               <a:pPr/>
-              <a:t>11/12/2025</a:t>
+              <a:t>11/16/2025</a:t>
             </a:fld>
             <a:endParaRPr lang="en-US"/>
           </a:p>
@@ -2827,7 +2834,7 @@
             <a:fld id="{1D8BD707-D9CF-40AE-B4C6-C98DA3205C09}" type="datetimeFigureOut">
               <a:rPr lang="en-US" smtClean="0"/>
               <a:pPr/>
-              <a:t>11/12/2025</a:t>
+              <a:t>11/16/2025</a:t>
             </a:fld>
             <a:endParaRPr lang="en-US"/>
           </a:p>
@@ -3035,7 +3042,7 @@
             <a:fld id="{1D8BD707-D9CF-40AE-B4C6-C98DA3205C09}" type="datetimeFigureOut">
               <a:rPr lang="en-US" smtClean="0"/>
               <a:pPr/>
-              <a:t>11/12/2025</a:t>
+              <a:t>11/16/2025</a:t>
             </a:fld>
             <a:endParaRPr lang="en-US"/>
           </a:p>
@@ -4591,10 +4598,1342 @@
           </a:prstGeom>
         </p:spPr>
       </p:pic>
+      <p:sp>
+        <p:nvSpPr>
+          <p:cNvPr id="7" name="TextBox 6">
+            <a:extLst>
+              <a:ext uri="{FF2B5EF4-FFF2-40B4-BE49-F238E27FC236}">
+                <a16:creationId xmlns:a16="http://schemas.microsoft.com/office/drawing/2014/main" id="{9B6EFF51-41A5-6098-2F3B-EAFA09638BE7}"/>
+              </a:ext>
+            </a:extLst>
+          </p:cNvPr>
+          <p:cNvSpPr txBox="1"/>
+          <p:nvPr/>
+        </p:nvSpPr>
+        <p:spPr>
+          <a:xfrm>
+            <a:off x="2220640" y="3097281"/>
+            <a:ext cx="5897768" cy="400110"/>
+          </a:xfrm>
+          <a:prstGeom prst="rect">
+            <a:avLst/>
+          </a:prstGeom>
+          <a:noFill/>
+        </p:spPr>
+        <p:txBody>
+          <a:bodyPr wrap="none" rtlCol="0">
+            <a:spAutoFit/>
+          </a:bodyPr>
+          <a:lstStyle/>
+          <a:p>
+            <a:r>
+              <a:rPr lang="en-US" sz="2000" b="1" i="0" u="none" strike="noStrike" dirty="0">
+                <a:solidFill>
+                  <a:srgbClr val="000000"/>
+                </a:solidFill>
+                <a:effectLst/>
+                <a:latin typeface="Slight" panose="00000500000000000000" pitchFamily="2" charset="0"/>
+              </a:rPr>
+              <a:t>A. K. M Mahmud - </a:t>
+            </a:r>
+            <a:r>
+              <a:rPr lang="en-US" sz="2000" b="1" i="0" u="none" strike="noStrike" dirty="0" err="1">
+                <a:solidFill>
+                  <a:srgbClr val="000000"/>
+                </a:solidFill>
+                <a:effectLst/>
+                <a:latin typeface="Slight" panose="00000500000000000000" pitchFamily="2" charset="0"/>
+              </a:rPr>
+              <a:t>Ul</a:t>
+            </a:r>
+            <a:r>
+              <a:rPr lang="en-US" sz="2000" b="1" i="0" u="none" strike="noStrike" dirty="0">
+                <a:solidFill>
+                  <a:srgbClr val="000000"/>
+                </a:solidFill>
+                <a:effectLst/>
+                <a:latin typeface="Slight" panose="00000500000000000000" pitchFamily="2" charset="0"/>
+              </a:rPr>
+              <a:t> - Hasan</a:t>
+            </a:r>
+            <a:r>
+              <a:rPr lang="en-US" sz="2000" dirty="0">
+                <a:latin typeface="Slight" panose="00000500000000000000" pitchFamily="2" charset="0"/>
+              </a:rPr>
+              <a:t> </a:t>
+            </a:r>
+          </a:p>
+        </p:txBody>
+      </p:sp>
     </p:spTree>
     <p:extLst>
       <p:ext uri="{BB962C8B-B14F-4D97-AF65-F5344CB8AC3E}">
         <p14:creationId xmlns:p14="http://schemas.microsoft.com/office/powerpoint/2010/main" val="2729603880"/>
+      </p:ext>
+    </p:extLst>
+  </p:cSld>
+  <p:clrMapOvr>
+    <a:masterClrMapping/>
+  </p:clrMapOvr>
+</p:sld>
+</file>
+
+<file path=ppt/slides/slide2.xml><?xml version="1.0" encoding="utf-8"?>
+<p:sld xmlns:a="http://schemas.openxmlformats.org/drawingml/2006/main" xmlns:r="http://schemas.openxmlformats.org/officeDocument/2006/relationships" xmlns:p="http://schemas.openxmlformats.org/presentationml/2006/main">
+  <p:cSld>
+    <p:spTree>
+      <p:nvGrpSpPr>
+        <p:cNvPr id="1" name="">
+          <a:extLst>
+            <a:ext uri="{FF2B5EF4-FFF2-40B4-BE49-F238E27FC236}">
+              <a16:creationId xmlns:a16="http://schemas.microsoft.com/office/drawing/2014/main" id="{A4764931-86F4-7C9F-B2BB-560F2A463A6B}"/>
+            </a:ext>
+          </a:extLst>
+        </p:cNvPr>
+        <p:cNvGrpSpPr/>
+        <p:nvPr/>
+      </p:nvGrpSpPr>
+      <p:grpSpPr>
+        <a:xfrm>
+          <a:off x="0" y="0"/>
+          <a:ext cx="0" cy="0"/>
+          <a:chOff x="0" y="0"/>
+          <a:chExt cx="0" cy="0"/>
+        </a:xfrm>
+      </p:grpSpPr>
+      <p:sp>
+        <p:nvSpPr>
+          <p:cNvPr id="2" name="Freeform 2">
+            <a:extLst>
+              <a:ext uri="{FF2B5EF4-FFF2-40B4-BE49-F238E27FC236}">
+                <a16:creationId xmlns:a16="http://schemas.microsoft.com/office/drawing/2014/main" id="{76E6FBCD-6C27-7E02-619A-B2776F692FD2}"/>
+              </a:ext>
+            </a:extLst>
+          </p:cNvPr>
+          <p:cNvSpPr/>
+          <p:nvPr/>
+        </p:nvSpPr>
+        <p:spPr>
+          <a:xfrm>
+            <a:off x="-393700" y="-349250"/>
+            <a:ext cx="10692000" cy="7560000"/>
+          </a:xfrm>
+          <a:custGeom>
+            <a:avLst/>
+            <a:gdLst/>
+            <a:ahLst/>
+            <a:cxnLst/>
+            <a:rect l="l" t="t" r="r" b="b"/>
+            <a:pathLst>
+              <a:path w="10692000" h="7560000">
+                <a:moveTo>
+                  <a:pt x="0" y="0"/>
+                </a:moveTo>
+                <a:lnTo>
+                  <a:pt x="10692000" y="0"/>
+                </a:lnTo>
+                <a:lnTo>
+                  <a:pt x="10692000" y="7560000"/>
+                </a:lnTo>
+                <a:lnTo>
+                  <a:pt x="0" y="7560000"/>
+                </a:lnTo>
+                <a:lnTo>
+                  <a:pt x="0" y="0"/>
+                </a:lnTo>
+                <a:close/>
+              </a:path>
+            </a:pathLst>
+          </a:custGeom>
+          <a:blipFill>
+            <a:blip r:embed="rId2">
+              <a:extLst>
+                <a:ext uri="{BEBA8EAE-BF5A-486C-A8C5-ECC9F3942E4B}">
+                  <a14:imgProps xmlns:a14="http://schemas.microsoft.com/office/drawing/2010/main">
+                    <a14:imgLayer r:embed="rId3">
+                      <a14:imgEffect>
+                        <a14:colorTemperature colorTemp="4700"/>
+                      </a14:imgEffect>
+                    </a14:imgLayer>
+                  </a14:imgProps>
+                </a:ext>
+              </a:extLst>
+            </a:blip>
+            <a:stretch>
+              <a:fillRect l="-1069" t="-22226" r="-1069" b="-22226"/>
+            </a:stretch>
+          </a:blipFill>
+        </p:spPr>
+      </p:sp>
+      <p:sp>
+        <p:nvSpPr>
+          <p:cNvPr id="3" name="Freeform 3">
+            <a:extLst>
+              <a:ext uri="{FF2B5EF4-FFF2-40B4-BE49-F238E27FC236}">
+                <a16:creationId xmlns:a16="http://schemas.microsoft.com/office/drawing/2014/main" id="{A0404BF7-1845-4262-7143-1E869AB360BB}"/>
+              </a:ext>
+            </a:extLst>
+          </p:cNvPr>
+          <p:cNvSpPr/>
+          <p:nvPr/>
+        </p:nvSpPr>
+        <p:spPr>
+          <a:xfrm rot="-5400000">
+            <a:off x="1172299" y="-1915251"/>
+            <a:ext cx="7560001" cy="10692000"/>
+          </a:xfrm>
+          <a:custGeom>
+            <a:avLst/>
+            <a:gdLst/>
+            <a:ahLst/>
+            <a:cxnLst/>
+            <a:rect l="l" t="t" r="r" b="b"/>
+            <a:pathLst>
+              <a:path w="8274830" h="11066206">
+                <a:moveTo>
+                  <a:pt x="0" y="0"/>
+                </a:moveTo>
+                <a:lnTo>
+                  <a:pt x="8274830" y="0"/>
+                </a:lnTo>
+                <a:lnTo>
+                  <a:pt x="8274830" y="11066206"/>
+                </a:lnTo>
+                <a:lnTo>
+                  <a:pt x="0" y="11066206"/>
+                </a:lnTo>
+                <a:lnTo>
+                  <a:pt x="0" y="0"/>
+                </a:lnTo>
+                <a:close/>
+              </a:path>
+            </a:pathLst>
+          </a:custGeom>
+          <a:blipFill>
+            <a:blip r:embed="rId4">
+              <a:alphaModFix amt="5000"/>
+              <a:extLst>
+                <a:ext uri="{96DAC541-7B7A-43D3-8B79-37D633B846F1}">
+                  <asvg:svgBlip xmlns:asvg="http://schemas.microsoft.com/office/drawing/2016/SVG/main" r:embed="rId5"/>
+                </a:ext>
+              </a:extLst>
+            </a:blip>
+            <a:stretch>
+              <a:fillRect/>
+            </a:stretch>
+          </a:blipFill>
+        </p:spPr>
+      </p:sp>
+      <p:sp>
+        <p:nvSpPr>
+          <p:cNvPr id="4" name="Freeform 4">
+            <a:extLst>
+              <a:ext uri="{FF2B5EF4-FFF2-40B4-BE49-F238E27FC236}">
+                <a16:creationId xmlns:a16="http://schemas.microsoft.com/office/drawing/2014/main" id="{8D1AB6D7-DBC7-35A2-8697-93140A231AE4}"/>
+              </a:ext>
+            </a:extLst>
+          </p:cNvPr>
+          <p:cNvSpPr/>
+          <p:nvPr/>
+        </p:nvSpPr>
+        <p:spPr>
+          <a:xfrm>
+            <a:off x="-143308" y="-118133"/>
+            <a:ext cx="10191217" cy="7097766"/>
+          </a:xfrm>
+          <a:custGeom>
+            <a:avLst/>
+            <a:gdLst/>
+            <a:ahLst/>
+            <a:cxnLst/>
+            <a:rect l="l" t="t" r="r" b="b"/>
+            <a:pathLst>
+              <a:path w="10191217" h="7097766">
+                <a:moveTo>
+                  <a:pt x="0" y="0"/>
+                </a:moveTo>
+                <a:lnTo>
+                  <a:pt x="10191216" y="0"/>
+                </a:lnTo>
+                <a:lnTo>
+                  <a:pt x="10191216" y="7097766"/>
+                </a:lnTo>
+                <a:lnTo>
+                  <a:pt x="0" y="7097766"/>
+                </a:lnTo>
+                <a:lnTo>
+                  <a:pt x="0" y="0"/>
+                </a:lnTo>
+                <a:close/>
+              </a:path>
+            </a:pathLst>
+          </a:custGeom>
+          <a:blipFill>
+            <a:blip r:embed="rId6">
+              <a:extLst>
+                <a:ext uri="{96DAC541-7B7A-43D3-8B79-37D633B846F1}">
+                  <asvg:svgBlip xmlns:asvg="http://schemas.microsoft.com/office/drawing/2016/SVG/main" r:embed="rId7"/>
+                </a:ext>
+              </a:extLst>
+            </a:blip>
+            <a:stretch>
+              <a:fillRect/>
+            </a:stretch>
+          </a:blipFill>
+        </p:spPr>
+      </p:sp>
+      <p:sp>
+        <p:nvSpPr>
+          <p:cNvPr id="5" name="AutoShape 5">
+            <a:extLst>
+              <a:ext uri="{FF2B5EF4-FFF2-40B4-BE49-F238E27FC236}">
+                <a16:creationId xmlns:a16="http://schemas.microsoft.com/office/drawing/2014/main" id="{126A9028-3A04-0A9D-4CEE-EF53A531628F}"/>
+              </a:ext>
+            </a:extLst>
+          </p:cNvPr>
+          <p:cNvSpPr/>
+          <p:nvPr/>
+        </p:nvSpPr>
+        <p:spPr>
+          <a:xfrm>
+            <a:off x="1219200" y="3581400"/>
+            <a:ext cx="7620000" cy="0"/>
+          </a:xfrm>
+          <a:prstGeom prst="line">
+            <a:avLst/>
+          </a:prstGeom>
+          <a:ln w="9525" cap="flat">
+            <a:solidFill>
+              <a:srgbClr val="3D3B3A"/>
+            </a:solidFill>
+            <a:prstDash val="solid"/>
+            <a:headEnd type="none" w="sm" len="sm"/>
+            <a:tailEnd type="none" w="sm" len="sm"/>
+          </a:ln>
+        </p:spPr>
+      </p:sp>
+      <p:sp>
+        <p:nvSpPr>
+          <p:cNvPr id="6" name="AutoShape 6">
+            <a:extLst>
+              <a:ext uri="{FF2B5EF4-FFF2-40B4-BE49-F238E27FC236}">
+                <a16:creationId xmlns:a16="http://schemas.microsoft.com/office/drawing/2014/main" id="{EE28AAC3-A98B-6770-FEB0-E6513C7DCB7A}"/>
+              </a:ext>
+            </a:extLst>
+          </p:cNvPr>
+          <p:cNvSpPr/>
+          <p:nvPr/>
+        </p:nvSpPr>
+        <p:spPr>
+          <a:xfrm>
+            <a:off x="202199" y="6053384"/>
+            <a:ext cx="1994552" cy="0"/>
+          </a:xfrm>
+          <a:prstGeom prst="line">
+            <a:avLst/>
+          </a:prstGeom>
+          <a:ln w="9525" cap="flat">
+            <a:solidFill>
+              <a:srgbClr val="3D3B3A"/>
+            </a:solidFill>
+            <a:prstDash val="solid"/>
+            <a:headEnd type="none" w="sm" len="sm"/>
+            <a:tailEnd type="none" w="sm" len="sm"/>
+          </a:ln>
+        </p:spPr>
+      </p:sp>
+      <p:sp>
+        <p:nvSpPr>
+          <p:cNvPr id="9" name="TextBox 9">
+            <a:extLst>
+              <a:ext uri="{FF2B5EF4-FFF2-40B4-BE49-F238E27FC236}">
+                <a16:creationId xmlns:a16="http://schemas.microsoft.com/office/drawing/2014/main" id="{C31ADF7D-6553-0B03-2DAE-0643D47770DE}"/>
+              </a:ext>
+            </a:extLst>
+          </p:cNvPr>
+          <p:cNvSpPr txBox="1"/>
+          <p:nvPr/>
+        </p:nvSpPr>
+        <p:spPr>
+          <a:xfrm>
+            <a:off x="865944" y="449448"/>
+            <a:ext cx="7973256" cy="1379352"/>
+          </a:xfrm>
+          <a:prstGeom prst="rect">
+            <a:avLst/>
+          </a:prstGeom>
+        </p:spPr>
+        <p:txBody>
+          <a:bodyPr wrap="square" lIns="0" tIns="0" rIns="0" bIns="0" rtlCol="0" anchor="t">
+            <a:spAutoFit/>
+          </a:bodyPr>
+          <a:lstStyle/>
+          <a:p>
+            <a:pPr algn="ctr">
+              <a:lnSpc>
+                <a:spcPts val="12319"/>
+              </a:lnSpc>
+            </a:pPr>
+            <a:r>
+              <a:rPr lang="en-US" sz="6600" spc="300" dirty="0">
+                <a:solidFill>
+                  <a:srgbClr val="3D3B3A"/>
+                </a:solidFill>
+                <a:latin typeface="Times New Roman" panose="02020603050405020304" pitchFamily="18" charset="0"/>
+                <a:ea typeface="Crimson Pro"/>
+                <a:cs typeface="Times New Roman" panose="02020603050405020304" pitchFamily="18" charset="0"/>
+                <a:sym typeface="Crimson Pro"/>
+              </a:rPr>
+              <a:t>CERTIFICATE</a:t>
+            </a:r>
+          </a:p>
+        </p:txBody>
+      </p:sp>
+      <p:sp>
+        <p:nvSpPr>
+          <p:cNvPr id="10" name="TextBox 10">
+            <a:extLst>
+              <a:ext uri="{FF2B5EF4-FFF2-40B4-BE49-F238E27FC236}">
+                <a16:creationId xmlns:a16="http://schemas.microsoft.com/office/drawing/2014/main" id="{7B6B70C5-ED29-FC48-22E8-2B040C50A259}"/>
+              </a:ext>
+            </a:extLst>
+          </p:cNvPr>
+          <p:cNvSpPr txBox="1"/>
+          <p:nvPr/>
+        </p:nvSpPr>
+        <p:spPr>
+          <a:xfrm>
+            <a:off x="2741033" y="1798519"/>
+            <a:ext cx="4422537" cy="339651"/>
+          </a:xfrm>
+          <a:prstGeom prst="rect">
+            <a:avLst/>
+          </a:prstGeom>
+        </p:spPr>
+        <p:txBody>
+          <a:bodyPr lIns="0" tIns="0" rIns="0" bIns="0" rtlCol="0" anchor="t">
+            <a:spAutoFit/>
+          </a:bodyPr>
+          <a:lstStyle/>
+          <a:p>
+            <a:pPr algn="ctr">
+              <a:lnSpc>
+                <a:spcPts val="2799"/>
+              </a:lnSpc>
+            </a:pPr>
+            <a:r>
+              <a:rPr lang="en-US" sz="1999" b="1" spc="300" dirty="0">
+                <a:solidFill>
+                  <a:srgbClr val="3D3B3A"/>
+                </a:solidFill>
+                <a:latin typeface="Times New Roman" panose="02020603050405020304" pitchFamily="18" charset="0"/>
+                <a:ea typeface="Open Sans Bold"/>
+                <a:cs typeface="Times New Roman" panose="02020603050405020304" pitchFamily="18" charset="0"/>
+                <a:sym typeface="Open Sans Bold"/>
+              </a:rPr>
+              <a:t>OF COMPLETION</a:t>
+            </a:r>
+          </a:p>
+        </p:txBody>
+      </p:sp>
+      <p:sp>
+        <p:nvSpPr>
+          <p:cNvPr id="11" name="TextBox 11">
+            <a:extLst>
+              <a:ext uri="{FF2B5EF4-FFF2-40B4-BE49-F238E27FC236}">
+                <a16:creationId xmlns:a16="http://schemas.microsoft.com/office/drawing/2014/main" id="{610F67F0-50A1-61A2-A9D5-648C1C947CEB}"/>
+              </a:ext>
+            </a:extLst>
+          </p:cNvPr>
+          <p:cNvSpPr txBox="1"/>
+          <p:nvPr/>
+        </p:nvSpPr>
+        <p:spPr>
+          <a:xfrm>
+            <a:off x="2895600" y="2362201"/>
+            <a:ext cx="3572224" cy="282129"/>
+          </a:xfrm>
+          <a:prstGeom prst="rect">
+            <a:avLst/>
+          </a:prstGeom>
+        </p:spPr>
+        <p:txBody>
+          <a:bodyPr lIns="0" tIns="0" rIns="0" bIns="0" rtlCol="0" anchor="t">
+            <a:spAutoFit/>
+          </a:bodyPr>
+          <a:lstStyle/>
+          <a:p>
+            <a:pPr algn="ctr">
+              <a:lnSpc>
+                <a:spcPts val="2239"/>
+              </a:lnSpc>
+            </a:pPr>
+            <a:r>
+              <a:rPr lang="en-US" sz="2400" i="1" spc="239" dirty="0">
+                <a:solidFill>
+                  <a:srgbClr val="3D3B3A"/>
+                </a:solidFill>
+                <a:latin typeface="Times New Roman" panose="02020603050405020304" pitchFamily="18" charset="0"/>
+                <a:ea typeface="Crimson Pro Italics"/>
+                <a:cs typeface="Times New Roman" panose="02020603050405020304" pitchFamily="18" charset="0"/>
+                <a:sym typeface="Crimson Pro Italics"/>
+              </a:rPr>
+              <a:t>proudly presented to</a:t>
+            </a:r>
+          </a:p>
+        </p:txBody>
+      </p:sp>
+      <p:sp>
+        <p:nvSpPr>
+          <p:cNvPr id="12" name="TextBox 12">
+            <a:extLst>
+              <a:ext uri="{FF2B5EF4-FFF2-40B4-BE49-F238E27FC236}">
+                <a16:creationId xmlns:a16="http://schemas.microsoft.com/office/drawing/2014/main" id="{12A8C5E2-A48E-5EA9-21B5-01A46D97B04C}"/>
+              </a:ext>
+            </a:extLst>
+          </p:cNvPr>
+          <p:cNvSpPr txBox="1"/>
+          <p:nvPr/>
+        </p:nvSpPr>
+        <p:spPr>
+          <a:xfrm>
+            <a:off x="-168708" y="3753453"/>
+            <a:ext cx="9485928" cy="282129"/>
+          </a:xfrm>
+          <a:prstGeom prst="rect">
+            <a:avLst/>
+          </a:prstGeom>
+        </p:spPr>
+        <p:txBody>
+          <a:bodyPr wrap="square" lIns="0" tIns="0" rIns="0" bIns="0" rtlCol="0" anchor="t">
+            <a:spAutoFit/>
+          </a:bodyPr>
+          <a:lstStyle/>
+          <a:p>
+            <a:pPr algn="ctr">
+              <a:lnSpc>
+                <a:spcPts val="2239"/>
+              </a:lnSpc>
+              <a:spcBef>
+                <a:spcPct val="0"/>
+              </a:spcBef>
+            </a:pPr>
+            <a:r>
+              <a:rPr lang="en-US" sz="2000" i="1" spc="239" dirty="0">
+                <a:solidFill>
+                  <a:srgbClr val="3D3B3A"/>
+                </a:solidFill>
+                <a:latin typeface="Times New Roman" panose="02020603050405020304" pitchFamily="18" charset="0"/>
+                <a:ea typeface="Crimson Pro Italics"/>
+                <a:cs typeface="Times New Roman" panose="02020603050405020304" pitchFamily="18" charset="0"/>
+                <a:sym typeface="Crimson Pro Italics"/>
+              </a:rPr>
+              <a:t>For Successfully Completing the Course   </a:t>
+            </a:r>
+          </a:p>
+        </p:txBody>
+      </p:sp>
+      <p:pic>
+        <p:nvPicPr>
+          <p:cNvPr id="19" name="Picture 18" descr="A logo with a flower in the middle">
+            <a:extLst>
+              <a:ext uri="{FF2B5EF4-FFF2-40B4-BE49-F238E27FC236}">
+                <a16:creationId xmlns:a16="http://schemas.microsoft.com/office/drawing/2014/main" id="{BF5E03BA-F900-017F-2B19-98865D0BD057}"/>
+              </a:ext>
+            </a:extLst>
+          </p:cNvPr>
+          <p:cNvPicPr>
+            <a:picLocks noChangeAspect="1"/>
+          </p:cNvPicPr>
+          <p:nvPr/>
+        </p:nvPicPr>
+        <p:blipFill>
+          <a:blip r:embed="rId8"/>
+          <a:stretch>
+            <a:fillRect/>
+          </a:stretch>
+        </p:blipFill>
+        <p:spPr>
+          <a:xfrm>
+            <a:off x="4137650" y="41186"/>
+            <a:ext cx="873215" cy="873215"/>
+          </a:xfrm>
+          <a:prstGeom prst="rect">
+            <a:avLst/>
+          </a:prstGeom>
+        </p:spPr>
+      </p:pic>
+      <p:grpSp>
+        <p:nvGrpSpPr>
+          <p:cNvPr id="43" name="Group 42">
+            <a:extLst>
+              <a:ext uri="{FF2B5EF4-FFF2-40B4-BE49-F238E27FC236}">
+                <a16:creationId xmlns:a16="http://schemas.microsoft.com/office/drawing/2014/main" id="{DC80458B-5FEA-85CA-1E18-B9CEACB53B4A}"/>
+              </a:ext>
+            </a:extLst>
+          </p:cNvPr>
+          <p:cNvGrpSpPr/>
+          <p:nvPr/>
+        </p:nvGrpSpPr>
+        <p:grpSpPr>
+          <a:xfrm>
+            <a:off x="2590800" y="4746044"/>
+            <a:ext cx="4133996" cy="946323"/>
+            <a:chOff x="3134732" y="4822490"/>
+            <a:chExt cx="4133996" cy="946323"/>
+          </a:xfrm>
+        </p:grpSpPr>
+        <p:sp>
+          <p:nvSpPr>
+            <p:cNvPr id="29" name="Google Shape;67;p13">
+              <a:extLst>
+                <a:ext uri="{FF2B5EF4-FFF2-40B4-BE49-F238E27FC236}">
+                  <a16:creationId xmlns:a16="http://schemas.microsoft.com/office/drawing/2014/main" id="{6E368D4C-E42E-4B08-CEE7-FD7BAB5A4812}"/>
+                </a:ext>
+              </a:extLst>
+            </p:cNvPr>
+            <p:cNvSpPr txBox="1"/>
+            <p:nvPr/>
+          </p:nvSpPr>
+          <p:spPr>
+            <a:xfrm>
+              <a:off x="3134732" y="4822490"/>
+              <a:ext cx="1851600" cy="439001"/>
+            </a:xfrm>
+            <a:prstGeom prst="rect">
+              <a:avLst/>
+            </a:prstGeom>
+            <a:noFill/>
+            <a:ln>
+              <a:noFill/>
+            </a:ln>
+          </p:spPr>
+          <p:txBody>
+            <a:bodyPr spcFirstLastPara="1" wrap="square" lIns="91425" tIns="91425" rIns="91425" bIns="91425" anchor="t" anchorCtr="0">
+              <a:spAutoFit/>
+            </a:bodyPr>
+            <a:lstStyle/>
+            <a:p>
+              <a:pPr algn="ctr"/>
+              <a:r>
+                <a:rPr lang="en-GB" b="1" dirty="0">
+                  <a:solidFill>
+                    <a:srgbClr val="1A1A1A"/>
+                  </a:solidFill>
+                  <a:latin typeface="Times New Roman" panose="02020603050405020304" pitchFamily="18" charset="0"/>
+                  <a:ea typeface="Manrope SemiBold"/>
+                  <a:cs typeface="Times New Roman" panose="02020603050405020304" pitchFamily="18" charset="0"/>
+                  <a:sym typeface="Manrope SemiBold"/>
+                </a:rPr>
+                <a:t>Issuing date:</a:t>
+              </a:r>
+              <a:endParaRPr b="1" dirty="0">
+                <a:solidFill>
+                  <a:srgbClr val="1A1A1A"/>
+                </a:solidFill>
+                <a:latin typeface="Times New Roman" panose="02020603050405020304" pitchFamily="18" charset="0"/>
+                <a:ea typeface="Manrope SemiBold"/>
+                <a:cs typeface="Times New Roman" panose="02020603050405020304" pitchFamily="18" charset="0"/>
+                <a:sym typeface="Manrope SemiBold"/>
+              </a:endParaRPr>
+            </a:p>
+          </p:txBody>
+        </p:sp>
+        <p:sp>
+          <p:nvSpPr>
+            <p:cNvPr id="30" name="Google Shape;68;p13">
+              <a:extLst>
+                <a:ext uri="{FF2B5EF4-FFF2-40B4-BE49-F238E27FC236}">
+                  <a16:creationId xmlns:a16="http://schemas.microsoft.com/office/drawing/2014/main" id="{43BE00DD-CA5C-A70B-E553-4DCEADD7071E}"/>
+                </a:ext>
+              </a:extLst>
+            </p:cNvPr>
+            <p:cNvSpPr txBox="1"/>
+            <p:nvPr/>
+          </p:nvSpPr>
+          <p:spPr>
+            <a:xfrm>
+              <a:off x="3169339" y="5329812"/>
+              <a:ext cx="1851600" cy="439001"/>
+            </a:xfrm>
+            <a:prstGeom prst="rect">
+              <a:avLst/>
+            </a:prstGeom>
+            <a:noFill/>
+            <a:ln>
+              <a:noFill/>
+            </a:ln>
+          </p:spPr>
+          <p:txBody>
+            <a:bodyPr spcFirstLastPara="1" wrap="square" lIns="91425" tIns="91425" rIns="91425" bIns="91425" anchor="t" anchorCtr="0">
+              <a:spAutoFit/>
+            </a:bodyPr>
+            <a:lstStyle/>
+            <a:p>
+              <a:pPr algn="ctr"/>
+              <a:r>
+                <a:rPr lang="en-GB" b="1" dirty="0">
+                  <a:solidFill>
+                    <a:srgbClr val="1A1A1A"/>
+                  </a:solidFill>
+                  <a:latin typeface="Times New Roman" panose="02020603050405020304" pitchFamily="18" charset="0"/>
+                  <a:ea typeface="Manrope SemiBold"/>
+                  <a:cs typeface="Times New Roman" panose="02020603050405020304" pitchFamily="18" charset="0"/>
+                  <a:sym typeface="Manrope SemiBold"/>
+                </a:rPr>
+                <a:t>Certificate ID:</a:t>
+              </a:r>
+              <a:endParaRPr b="1" dirty="0">
+                <a:solidFill>
+                  <a:srgbClr val="1A1A1A"/>
+                </a:solidFill>
+                <a:latin typeface="Times New Roman" panose="02020603050405020304" pitchFamily="18" charset="0"/>
+                <a:ea typeface="Manrope SemiBold"/>
+                <a:cs typeface="Times New Roman" panose="02020603050405020304" pitchFamily="18" charset="0"/>
+                <a:sym typeface="Manrope SemiBold"/>
+              </a:endParaRPr>
+            </a:p>
+          </p:txBody>
+        </p:sp>
+        <p:sp>
+          <p:nvSpPr>
+            <p:cNvPr id="31" name="Google Shape;69;p13">
+              <a:extLst>
+                <a:ext uri="{FF2B5EF4-FFF2-40B4-BE49-F238E27FC236}">
+                  <a16:creationId xmlns:a16="http://schemas.microsoft.com/office/drawing/2014/main" id="{DADD0419-B4A4-43D5-806A-1DFD228820D2}"/>
+                </a:ext>
+              </a:extLst>
+            </p:cNvPr>
+            <p:cNvSpPr/>
+            <p:nvPr/>
+          </p:nvSpPr>
+          <p:spPr>
+            <a:xfrm>
+              <a:off x="4792339" y="4989676"/>
+              <a:ext cx="1622100" cy="172950"/>
+            </a:xfrm>
+            <a:prstGeom prst="roundRect">
+              <a:avLst>
+                <a:gd name="adj" fmla="val 16667"/>
+              </a:avLst>
+            </a:prstGeom>
+            <a:noFill/>
+            <a:ln>
+              <a:noFill/>
+            </a:ln>
+          </p:spPr>
+          <p:txBody>
+            <a:bodyPr spcFirstLastPara="1" wrap="square" lIns="91425" tIns="91425" rIns="91425" bIns="91425" anchor="ctr" anchorCtr="0">
+              <a:noAutofit/>
+            </a:bodyPr>
+            <a:lstStyle/>
+            <a:p>
+              <a:pPr algn="ctr"/>
+              <a:r>
+                <a:rPr lang="en-GB" b="1" dirty="0">
+                  <a:latin typeface="Times New Roman" panose="02020603050405020304" pitchFamily="18" charset="0"/>
+                  <a:ea typeface="Manrope Medium"/>
+                  <a:cs typeface="Times New Roman" panose="02020603050405020304" pitchFamily="18" charset="0"/>
+                  <a:sym typeface="Manrope Medium"/>
+                </a:rPr>
+                <a:t>14.11.2021</a:t>
+              </a:r>
+              <a:endParaRPr b="1" dirty="0">
+                <a:latin typeface="Times New Roman" panose="02020603050405020304" pitchFamily="18" charset="0"/>
+                <a:ea typeface="Manrope Medium"/>
+                <a:cs typeface="Times New Roman" panose="02020603050405020304" pitchFamily="18" charset="0"/>
+                <a:sym typeface="Manrope Medium"/>
+              </a:endParaRPr>
+            </a:p>
+          </p:txBody>
+        </p:sp>
+        <p:sp>
+          <p:nvSpPr>
+            <p:cNvPr id="32" name="Google Shape;70;p13">
+              <a:extLst>
+                <a:ext uri="{FF2B5EF4-FFF2-40B4-BE49-F238E27FC236}">
+                  <a16:creationId xmlns:a16="http://schemas.microsoft.com/office/drawing/2014/main" id="{B1B6A257-4CEE-4AC7-AA1C-AF161C630023}"/>
+                </a:ext>
+              </a:extLst>
+            </p:cNvPr>
+            <p:cNvSpPr/>
+            <p:nvPr/>
+          </p:nvSpPr>
+          <p:spPr>
+            <a:xfrm>
+              <a:off x="4944739" y="5467426"/>
+              <a:ext cx="2323989" cy="172950"/>
+            </a:xfrm>
+            <a:prstGeom prst="roundRect">
+              <a:avLst>
+                <a:gd name="adj" fmla="val 16667"/>
+              </a:avLst>
+            </a:prstGeom>
+            <a:noFill/>
+            <a:ln>
+              <a:noFill/>
+            </a:ln>
+          </p:spPr>
+          <p:txBody>
+            <a:bodyPr spcFirstLastPara="1" wrap="square" lIns="91425" tIns="91425" rIns="91425" bIns="91425" anchor="ctr" anchorCtr="0">
+              <a:noAutofit/>
+            </a:bodyPr>
+            <a:lstStyle/>
+            <a:p>
+              <a:pPr lvl="0">
+                <a:buClr>
+                  <a:schemeClr val="dk1"/>
+                </a:buClr>
+                <a:buSzPts val="1100"/>
+              </a:pPr>
+              <a:r>
+                <a:rPr lang="en-GB" b="1" dirty="0">
+                  <a:solidFill>
+                    <a:schemeClr val="dk1"/>
+                  </a:solidFill>
+                  <a:latin typeface="Times New Roman" panose="02020603050405020304" pitchFamily="18" charset="0"/>
+                  <a:ea typeface="Manrope Medium"/>
+                  <a:cs typeface="Times New Roman" panose="02020603050405020304" pitchFamily="18" charset="0"/>
+                  <a:sym typeface="Manrope Medium"/>
+                </a:rPr>
+                <a:t>SSBDCE202504011</a:t>
+              </a:r>
+              <a:endParaRPr b="1" dirty="0">
+                <a:latin typeface="Times New Roman" panose="02020603050405020304" pitchFamily="18" charset="0"/>
+                <a:cs typeface="Times New Roman" panose="02020603050405020304" pitchFamily="18" charset="0"/>
+              </a:endParaRPr>
+            </a:p>
+          </p:txBody>
+        </p:sp>
+      </p:grpSp>
+      <p:sp>
+        <p:nvSpPr>
+          <p:cNvPr id="17" name="Google Shape;62;p13">
+            <a:extLst>
+              <a:ext uri="{FF2B5EF4-FFF2-40B4-BE49-F238E27FC236}">
+                <a16:creationId xmlns:a16="http://schemas.microsoft.com/office/drawing/2014/main" id="{C1FF7043-C2CF-ED75-24AF-C08761F1B429}"/>
+              </a:ext>
+            </a:extLst>
+          </p:cNvPr>
+          <p:cNvSpPr txBox="1"/>
+          <p:nvPr/>
+        </p:nvSpPr>
+        <p:spPr>
+          <a:xfrm>
+            <a:off x="2938266" y="6070025"/>
+            <a:ext cx="4148335" cy="553968"/>
+          </a:xfrm>
+          <a:prstGeom prst="rect">
+            <a:avLst/>
+          </a:prstGeom>
+          <a:noFill/>
+          <a:ln>
+            <a:noFill/>
+          </a:ln>
+        </p:spPr>
+        <p:txBody>
+          <a:bodyPr spcFirstLastPara="1" wrap="square" lIns="91425" tIns="91425" rIns="91425" bIns="91425" anchor="t" anchorCtr="0">
+            <a:spAutoFit/>
+          </a:bodyPr>
+          <a:lstStyle/>
+          <a:p>
+            <a:r>
+              <a:rPr lang="en-GB" sz="2400" b="1" dirty="0">
+                <a:solidFill>
+                  <a:srgbClr val="21295C"/>
+                </a:solidFill>
+                <a:latin typeface="Times New Roman" panose="02020603050405020304" pitchFamily="18" charset="0"/>
+                <a:ea typeface="Manrope SemiBold"/>
+                <a:cs typeface="Times New Roman" panose="02020603050405020304" pitchFamily="18" charset="0"/>
+                <a:sym typeface="Manrope SemiBold"/>
+              </a:rPr>
+              <a:t>Simulation Support BD-SSBD</a:t>
+            </a:r>
+            <a:endParaRPr sz="2400" b="1" dirty="0">
+              <a:solidFill>
+                <a:srgbClr val="21295C"/>
+              </a:solidFill>
+              <a:latin typeface="Times New Roman" panose="02020603050405020304" pitchFamily="18" charset="0"/>
+              <a:ea typeface="Manrope SemiBold"/>
+              <a:cs typeface="Times New Roman" panose="02020603050405020304" pitchFamily="18" charset="0"/>
+              <a:sym typeface="Manrope SemiBold"/>
+            </a:endParaRPr>
+          </a:p>
+        </p:txBody>
+      </p:sp>
+      <p:pic>
+        <p:nvPicPr>
+          <p:cNvPr id="18" name="Picture 17" descr="A logo with a flower in the middle">
+            <a:extLst>
+              <a:ext uri="{FF2B5EF4-FFF2-40B4-BE49-F238E27FC236}">
+                <a16:creationId xmlns:a16="http://schemas.microsoft.com/office/drawing/2014/main" id="{BB8ED5D0-3F7C-8C2A-F60E-0CBA9C30FA5E}"/>
+              </a:ext>
+            </a:extLst>
+          </p:cNvPr>
+          <p:cNvPicPr>
+            <a:picLocks noChangeAspect="1"/>
+          </p:cNvPicPr>
+          <p:nvPr/>
+        </p:nvPicPr>
+        <p:blipFill>
+          <a:blip r:embed="rId8"/>
+          <a:stretch>
+            <a:fillRect/>
+          </a:stretch>
+        </p:blipFill>
+        <p:spPr>
+          <a:xfrm>
+            <a:off x="2589105" y="6165148"/>
+            <a:ext cx="390516" cy="390516"/>
+          </a:xfrm>
+          <a:prstGeom prst="rect">
+            <a:avLst/>
+          </a:prstGeom>
+        </p:spPr>
+      </p:pic>
+      <p:pic>
+        <p:nvPicPr>
+          <p:cNvPr id="20" name="Picture 19" descr="A black text on a white background">
+            <a:extLst>
+              <a:ext uri="{FF2B5EF4-FFF2-40B4-BE49-F238E27FC236}">
+                <a16:creationId xmlns:a16="http://schemas.microsoft.com/office/drawing/2014/main" id="{1FCDC1F2-AA23-223F-12C6-33B58820162A}"/>
+              </a:ext>
+            </a:extLst>
+          </p:cNvPr>
+          <p:cNvPicPr>
+            <a:picLocks noChangeAspect="1"/>
+          </p:cNvPicPr>
+          <p:nvPr/>
+        </p:nvPicPr>
+        <p:blipFill>
+          <a:blip r:embed="rId9">
+            <a:clrChange>
+              <a:clrFrom>
+                <a:srgbClr val="F5FCFC"/>
+              </a:clrFrom>
+              <a:clrTo>
+                <a:srgbClr val="F5FCFC">
+                  <a:alpha val="0"/>
+                </a:srgbClr>
+              </a:clrTo>
+            </a:clrChange>
+            <a:extLst>
+              <a:ext uri="{BEBA8EAE-BF5A-486C-A8C5-ECC9F3942E4B}">
+                <a14:imgProps xmlns:a14="http://schemas.microsoft.com/office/drawing/2010/main">
+                  <a14:imgLayer r:embed="rId10">
+                    <a14:imgEffect>
+                      <a14:colorTemperature colorTemp="5900"/>
+                    </a14:imgEffect>
+                    <a14:imgEffect>
+                      <a14:saturation sat="66000"/>
+                    </a14:imgEffect>
+                    <a14:imgEffect>
+                      <a14:brightnessContrast contrast="-40000"/>
+                    </a14:imgEffect>
+                  </a14:imgLayer>
+                </a14:imgProps>
+              </a:ext>
+            </a:extLst>
+          </a:blip>
+          <a:stretch>
+            <a:fillRect/>
+          </a:stretch>
+        </p:blipFill>
+        <p:spPr>
+          <a:xfrm>
+            <a:off x="172520" y="5308693"/>
+            <a:ext cx="2053910" cy="649047"/>
+          </a:xfrm>
+          <a:prstGeom prst="rect">
+            <a:avLst/>
+          </a:prstGeom>
+        </p:spPr>
+      </p:pic>
+      <p:sp>
+        <p:nvSpPr>
+          <p:cNvPr id="21" name="TextBox 32">
+            <a:extLst>
+              <a:ext uri="{FF2B5EF4-FFF2-40B4-BE49-F238E27FC236}">
+                <a16:creationId xmlns:a16="http://schemas.microsoft.com/office/drawing/2014/main" id="{6DDF1B89-C943-8779-C4A3-2CB5792FC180}"/>
+              </a:ext>
+            </a:extLst>
+          </p:cNvPr>
+          <p:cNvSpPr txBox="1"/>
+          <p:nvPr/>
+        </p:nvSpPr>
+        <p:spPr>
+          <a:xfrm>
+            <a:off x="232090" y="6149031"/>
+            <a:ext cx="1892564" cy="206595"/>
+          </a:xfrm>
+          <a:prstGeom prst="rect">
+            <a:avLst/>
+          </a:prstGeom>
+        </p:spPr>
+        <p:txBody>
+          <a:bodyPr wrap="square" lIns="0" tIns="0" rIns="0" bIns="0" rtlCol="0" anchor="t">
+            <a:spAutoFit/>
+          </a:bodyPr>
+          <a:lstStyle/>
+          <a:p>
+            <a:pPr algn="ctr">
+              <a:lnSpc>
+                <a:spcPts val="1679"/>
+              </a:lnSpc>
+            </a:pPr>
+            <a:r>
+              <a:rPr lang="en-US" sz="1200" b="1" dirty="0">
+                <a:solidFill>
+                  <a:srgbClr val="1D1D1D"/>
+                </a:solidFill>
+                <a:latin typeface="Times New Roman" panose="02020603050405020304" pitchFamily="18" charset="0"/>
+                <a:ea typeface="Poppins Bold"/>
+                <a:cs typeface="Times New Roman" panose="02020603050405020304" pitchFamily="18" charset="0"/>
+                <a:sym typeface="Poppins Bold"/>
+              </a:rPr>
+              <a:t>Sultan Mahmud</a:t>
+            </a:r>
+          </a:p>
+        </p:txBody>
+      </p:sp>
+      <p:sp>
+        <p:nvSpPr>
+          <p:cNvPr id="22" name="TextBox 33">
+            <a:extLst>
+              <a:ext uri="{FF2B5EF4-FFF2-40B4-BE49-F238E27FC236}">
+                <a16:creationId xmlns:a16="http://schemas.microsoft.com/office/drawing/2014/main" id="{362EE290-1C2D-F07B-86B6-D348DE686DB3}"/>
+              </a:ext>
+            </a:extLst>
+          </p:cNvPr>
+          <p:cNvSpPr txBox="1"/>
+          <p:nvPr/>
+        </p:nvSpPr>
+        <p:spPr>
+          <a:xfrm>
+            <a:off x="241036" y="6362035"/>
+            <a:ext cx="1892564" cy="204158"/>
+          </a:xfrm>
+          <a:prstGeom prst="rect">
+            <a:avLst/>
+          </a:prstGeom>
+        </p:spPr>
+        <p:txBody>
+          <a:bodyPr lIns="0" tIns="0" rIns="0" bIns="0" rtlCol="0" anchor="t">
+            <a:spAutoFit/>
+          </a:bodyPr>
+          <a:lstStyle/>
+          <a:p>
+            <a:pPr algn="ctr">
+              <a:lnSpc>
+                <a:spcPts val="1680"/>
+              </a:lnSpc>
+            </a:pPr>
+            <a:r>
+              <a:rPr lang="en-US" sz="1200" b="1" spc="60" dirty="0">
+                <a:solidFill>
+                  <a:srgbClr val="1D1D1D"/>
+                </a:solidFill>
+                <a:latin typeface="Times New Roman" panose="02020603050405020304" pitchFamily="18" charset="0"/>
+                <a:ea typeface="Poppins Bold Italics"/>
+                <a:cs typeface="Times New Roman" panose="02020603050405020304" pitchFamily="18" charset="0"/>
+                <a:sym typeface="Poppins Bold Italics"/>
+              </a:rPr>
+              <a:t>Instructor</a:t>
+            </a:r>
+          </a:p>
+        </p:txBody>
+      </p:sp>
+      <p:sp>
+        <p:nvSpPr>
+          <p:cNvPr id="40" name="AutoShape 6">
+            <a:extLst>
+              <a:ext uri="{FF2B5EF4-FFF2-40B4-BE49-F238E27FC236}">
+                <a16:creationId xmlns:a16="http://schemas.microsoft.com/office/drawing/2014/main" id="{BBB655E5-19CF-D730-2C4F-6CC4C5F5C1F4}"/>
+              </a:ext>
+            </a:extLst>
+          </p:cNvPr>
+          <p:cNvSpPr/>
+          <p:nvPr/>
+        </p:nvSpPr>
+        <p:spPr>
+          <a:xfrm>
+            <a:off x="7543801" y="6052348"/>
+            <a:ext cx="2246315" cy="0"/>
+          </a:xfrm>
+          <a:prstGeom prst="line">
+            <a:avLst/>
+          </a:prstGeom>
+          <a:ln w="9525" cap="flat">
+            <a:solidFill>
+              <a:srgbClr val="3D3B3A"/>
+            </a:solidFill>
+            <a:prstDash val="solid"/>
+            <a:headEnd type="none" w="sm" len="sm"/>
+            <a:tailEnd type="none" w="sm" len="sm"/>
+          </a:ln>
+        </p:spPr>
+      </p:sp>
+      <p:sp>
+        <p:nvSpPr>
+          <p:cNvPr id="41" name="TextBox 32">
+            <a:extLst>
+              <a:ext uri="{FF2B5EF4-FFF2-40B4-BE49-F238E27FC236}">
+                <a16:creationId xmlns:a16="http://schemas.microsoft.com/office/drawing/2014/main" id="{5B8DAE1E-F788-4E89-5F95-CD1A4635C6DF}"/>
+              </a:ext>
+            </a:extLst>
+          </p:cNvPr>
+          <p:cNvSpPr txBox="1"/>
+          <p:nvPr/>
+        </p:nvSpPr>
+        <p:spPr>
+          <a:xfrm>
+            <a:off x="7699690" y="6147995"/>
+            <a:ext cx="1892564" cy="206595"/>
+          </a:xfrm>
+          <a:prstGeom prst="rect">
+            <a:avLst/>
+          </a:prstGeom>
+        </p:spPr>
+        <p:txBody>
+          <a:bodyPr wrap="square" lIns="0" tIns="0" rIns="0" bIns="0" rtlCol="0" anchor="t">
+            <a:spAutoFit/>
+          </a:bodyPr>
+          <a:lstStyle/>
+          <a:p>
+            <a:pPr algn="ctr">
+              <a:lnSpc>
+                <a:spcPts val="1681"/>
+              </a:lnSpc>
+            </a:pPr>
+            <a:r>
+              <a:rPr lang="en-US" sz="1201" b="1" dirty="0">
+                <a:solidFill>
+                  <a:srgbClr val="1D1D1D"/>
+                </a:solidFill>
+                <a:latin typeface="Times New Roman" panose="02020603050405020304" pitchFamily="18" charset="0"/>
+                <a:ea typeface="Poppins Bold"/>
+                <a:cs typeface="Times New Roman" panose="02020603050405020304" pitchFamily="18" charset="0"/>
+                <a:sym typeface="Poppins Bold"/>
+              </a:rPr>
+              <a:t>Md Tasin Rahman Rakib</a:t>
+            </a:r>
+          </a:p>
+        </p:txBody>
+      </p:sp>
+      <p:sp>
+        <p:nvSpPr>
+          <p:cNvPr id="42" name="TextBox 33">
+            <a:extLst>
+              <a:ext uri="{FF2B5EF4-FFF2-40B4-BE49-F238E27FC236}">
+                <a16:creationId xmlns:a16="http://schemas.microsoft.com/office/drawing/2014/main" id="{1E20A8AC-46D0-3470-A32B-DBCF1F210749}"/>
+              </a:ext>
+            </a:extLst>
+          </p:cNvPr>
+          <p:cNvSpPr txBox="1"/>
+          <p:nvPr/>
+        </p:nvSpPr>
+        <p:spPr>
+          <a:xfrm>
+            <a:off x="7708636" y="6360999"/>
+            <a:ext cx="1892564" cy="204158"/>
+          </a:xfrm>
+          <a:prstGeom prst="rect">
+            <a:avLst/>
+          </a:prstGeom>
+        </p:spPr>
+        <p:txBody>
+          <a:bodyPr lIns="0" tIns="0" rIns="0" bIns="0" rtlCol="0" anchor="t">
+            <a:spAutoFit/>
+          </a:bodyPr>
+          <a:lstStyle/>
+          <a:p>
+            <a:pPr algn="ctr">
+              <a:lnSpc>
+                <a:spcPts val="1680"/>
+              </a:lnSpc>
+            </a:pPr>
+            <a:r>
+              <a:rPr lang="en-US" sz="1200" b="1" spc="60" dirty="0">
+                <a:solidFill>
+                  <a:srgbClr val="1D1D1D"/>
+                </a:solidFill>
+                <a:latin typeface="Times New Roman" panose="02020603050405020304" pitchFamily="18" charset="0"/>
+                <a:ea typeface="Poppins Bold Italics"/>
+                <a:cs typeface="Times New Roman" panose="02020603050405020304" pitchFamily="18" charset="0"/>
+                <a:sym typeface="Poppins Bold Italics"/>
+              </a:rPr>
+              <a:t>Assistant Manager</a:t>
+            </a:r>
+          </a:p>
+        </p:txBody>
+      </p:sp>
+      <p:pic>
+        <p:nvPicPr>
+          <p:cNvPr id="44" name="Picture 43">
+            <a:extLst>
+              <a:ext uri="{FF2B5EF4-FFF2-40B4-BE49-F238E27FC236}">
+                <a16:creationId xmlns:a16="http://schemas.microsoft.com/office/drawing/2014/main" id="{2D04F591-1B12-FD47-5EDB-D0F78766E746}"/>
+              </a:ext>
+            </a:extLst>
+          </p:cNvPr>
+          <p:cNvPicPr>
+            <a:picLocks noChangeAspect="1"/>
+          </p:cNvPicPr>
+          <p:nvPr/>
+        </p:nvPicPr>
+        <p:blipFill>
+          <a:blip r:embed="rId11"/>
+          <a:stretch>
+            <a:fillRect/>
+          </a:stretch>
+        </p:blipFill>
+        <p:spPr>
+          <a:xfrm>
+            <a:off x="-1827530" y="990601"/>
+            <a:ext cx="660434" cy="647733"/>
+          </a:xfrm>
+          <a:prstGeom prst="rect">
+            <a:avLst/>
+          </a:prstGeom>
+        </p:spPr>
+      </p:pic>
+      <p:sp>
+        <p:nvSpPr>
+          <p:cNvPr id="45" name="TextBox 10">
+            <a:extLst>
+              <a:ext uri="{FF2B5EF4-FFF2-40B4-BE49-F238E27FC236}">
+                <a16:creationId xmlns:a16="http://schemas.microsoft.com/office/drawing/2014/main" id="{D7FBE1CD-86A2-ED31-7E92-114FB00394EA}"/>
+              </a:ext>
+            </a:extLst>
+          </p:cNvPr>
+          <p:cNvSpPr txBox="1"/>
+          <p:nvPr/>
+        </p:nvSpPr>
+        <p:spPr>
+          <a:xfrm>
+            <a:off x="311437" y="4334870"/>
+            <a:ext cx="9617594" cy="389530"/>
+          </a:xfrm>
+          <a:prstGeom prst="rect">
+            <a:avLst/>
+          </a:prstGeom>
+        </p:spPr>
+        <p:txBody>
+          <a:bodyPr wrap="square" lIns="0" tIns="0" rIns="0" bIns="0" rtlCol="0" anchor="t">
+            <a:spAutoFit/>
+          </a:bodyPr>
+          <a:lstStyle/>
+          <a:p>
+            <a:pPr algn="ctr">
+              <a:lnSpc>
+                <a:spcPts val="2799"/>
+              </a:lnSpc>
+            </a:pPr>
+            <a:r>
+              <a:rPr lang="en-US" sz="4000" b="1" dirty="0">
+                <a:solidFill>
+                  <a:srgbClr val="3D3B3A"/>
+                </a:solidFill>
+                <a:latin typeface="Times New Roman" panose="02020603050405020304" pitchFamily="18" charset="0"/>
+                <a:ea typeface="Open Sans Bold"/>
+                <a:cs typeface="Times New Roman" panose="02020603050405020304" pitchFamily="18" charset="0"/>
+                <a:sym typeface="Open Sans Bold"/>
+              </a:rPr>
+              <a:t>ANSYS Fluent (CFD &amp; Heat Transfer)</a:t>
+            </a:r>
+          </a:p>
+        </p:txBody>
+      </p:sp>
+      <p:pic>
+        <p:nvPicPr>
+          <p:cNvPr id="15" name="Picture 14" descr="A black background with writing&#10;&#10;AI-generated content may be incorrect.">
+            <a:extLst>
+              <a:ext uri="{FF2B5EF4-FFF2-40B4-BE49-F238E27FC236}">
+                <a16:creationId xmlns:a16="http://schemas.microsoft.com/office/drawing/2014/main" id="{64FB93F1-5B7A-8410-A2E7-E32521A26345}"/>
+              </a:ext>
+            </a:extLst>
+          </p:cNvPr>
+          <p:cNvPicPr>
+            <a:picLocks noChangeAspect="1"/>
+          </p:cNvPicPr>
+          <p:nvPr/>
+        </p:nvPicPr>
+        <p:blipFill>
+          <a:blip r:embed="rId12" cstate="print">
+            <a:extLst>
+              <a:ext uri="{28A0092B-C50C-407E-A947-70E740481C1C}">
+                <a14:useLocalDpi xmlns:a14="http://schemas.microsoft.com/office/drawing/2010/main" val="0"/>
+              </a:ext>
+            </a:extLst>
+          </a:blip>
+          <a:stretch>
+            <a:fillRect/>
+          </a:stretch>
+        </p:blipFill>
+        <p:spPr>
+          <a:xfrm>
+            <a:off x="8229600" y="5388644"/>
+            <a:ext cx="847356" cy="635459"/>
+          </a:xfrm>
+          <a:prstGeom prst="rect">
+            <a:avLst/>
+          </a:prstGeom>
+        </p:spPr>
+      </p:pic>
+      <p:sp>
+        <p:nvSpPr>
+          <p:cNvPr id="7" name="TextBox 6">
+            <a:extLst>
+              <a:ext uri="{FF2B5EF4-FFF2-40B4-BE49-F238E27FC236}">
+                <a16:creationId xmlns:a16="http://schemas.microsoft.com/office/drawing/2014/main" id="{F1B0C266-803D-3BED-F02D-2B856CA2521A}"/>
+              </a:ext>
+            </a:extLst>
+          </p:cNvPr>
+          <p:cNvSpPr txBox="1"/>
+          <p:nvPr/>
+        </p:nvSpPr>
+        <p:spPr>
+          <a:xfrm>
+            <a:off x="2784363" y="3110855"/>
+            <a:ext cx="4865434" cy="400110"/>
+          </a:xfrm>
+          <a:prstGeom prst="rect">
+            <a:avLst/>
+          </a:prstGeom>
+          <a:noFill/>
+        </p:spPr>
+        <p:txBody>
+          <a:bodyPr wrap="none" rtlCol="0">
+            <a:spAutoFit/>
+          </a:bodyPr>
+          <a:lstStyle/>
+          <a:p>
+            <a:r>
+              <a:rPr lang="fi-FI" sz="2000" b="1" i="0" u="none" strike="noStrike" dirty="0">
+                <a:solidFill>
+                  <a:srgbClr val="000000"/>
+                </a:solidFill>
+                <a:effectLst/>
+                <a:latin typeface="Slight" panose="00000500000000000000" pitchFamily="2" charset="0"/>
+              </a:rPr>
+              <a:t>A. F. M. Mohaimen Khan</a:t>
+            </a:r>
+            <a:r>
+              <a:rPr lang="fi-FI" sz="2000" dirty="0">
+                <a:latin typeface="Slight" panose="00000500000000000000" pitchFamily="2" charset="0"/>
+              </a:rPr>
+              <a:t> </a:t>
+            </a:r>
+            <a:endParaRPr lang="en-US" sz="2000" dirty="0">
+              <a:latin typeface="Slight" panose="00000500000000000000" pitchFamily="2" charset="0"/>
+            </a:endParaRPr>
+          </a:p>
+        </p:txBody>
+      </p:sp>
+    </p:spTree>
+    <p:extLst>
+      <p:ext uri="{BB962C8B-B14F-4D97-AF65-F5344CB8AC3E}">
+        <p14:creationId xmlns:p14="http://schemas.microsoft.com/office/powerpoint/2010/main" val="470657650"/>
       </p:ext>
     </p:extLst>
   </p:cSld>

--- a/pptx_src/Certificate.pptx
+++ b/pptx_src/Certificate.pptx
@@ -5,18 +5,17 @@
     <p:sldMasterId id="2147483648" r:id="rId1"/>
   </p:sldMasterIdLst>
   <p:notesMasterIdLst>
-    <p:notesMasterId r:id="rId4"/>
+    <p:notesMasterId r:id="rId3"/>
   </p:notesMasterIdLst>
   <p:sldIdLst>
     <p:sldId id="257" r:id="rId2"/>
-    <p:sldId id="258" r:id="rId3"/>
   </p:sldIdLst>
   <p:sldSz cx="9906000" cy="6858000" type="A4"/>
   <p:notesSz cx="6858000" cy="9144000"/>
   <p:embeddedFontLst>
     <p:embeddedFont>
       <p:font typeface="Slight" panose="00000500000000000000" pitchFamily="2" charset="0"/>
-      <p:regular r:id="rId5"/>
+      <p:regular r:id="rId4"/>
     </p:embeddedFont>
   </p:embeddedFontLst>
   <p:defaultTextStyle>
@@ -215,7 +214,7 @@
           <a:p>
             <a:fld id="{5D2A3E32-B134-42CF-BF99-9DCA3D02EB99}" type="datetimeFigureOut">
               <a:rPr lang="en-US" smtClean="0"/>
-              <a:t>11/16/2025</a:t>
+              <a:t>11/19/2025</a:t>
             </a:fld>
             <a:endParaRPr lang="en-US"/>
           </a:p>
@@ -662,7 +661,7 @@
             <a:fld id="{1D8BD707-D9CF-40AE-B4C6-C98DA3205C09}" type="datetimeFigureOut">
               <a:rPr lang="en-US" smtClean="0"/>
               <a:pPr/>
-              <a:t>11/16/2025</a:t>
+              <a:t>11/19/2025</a:t>
             </a:fld>
             <a:endParaRPr lang="en-US"/>
           </a:p>
@@ -827,7 +826,7 @@
             <a:fld id="{1D8BD707-D9CF-40AE-B4C6-C98DA3205C09}" type="datetimeFigureOut">
               <a:rPr lang="en-US" smtClean="0"/>
               <a:pPr/>
-              <a:t>11/16/2025</a:t>
+              <a:t>11/19/2025</a:t>
             </a:fld>
             <a:endParaRPr lang="en-US"/>
           </a:p>
@@ -1002,7 +1001,7 @@
             <a:fld id="{1D8BD707-D9CF-40AE-B4C6-C98DA3205C09}" type="datetimeFigureOut">
               <a:rPr lang="en-US" smtClean="0"/>
               <a:pPr/>
-              <a:t>11/16/2025</a:t>
+              <a:t>11/19/2025</a:t>
             </a:fld>
             <a:endParaRPr lang="en-US"/>
           </a:p>
@@ -1167,7 +1166,7 @@
             <a:fld id="{1D8BD707-D9CF-40AE-B4C6-C98DA3205C09}" type="datetimeFigureOut">
               <a:rPr lang="en-US" smtClean="0"/>
               <a:pPr/>
-              <a:t>11/16/2025</a:t>
+              <a:t>11/19/2025</a:t>
             </a:fld>
             <a:endParaRPr lang="en-US"/>
           </a:p>
@@ -1409,7 +1408,7 @@
             <a:fld id="{1D8BD707-D9CF-40AE-B4C6-C98DA3205C09}" type="datetimeFigureOut">
               <a:rPr lang="en-US" smtClean="0"/>
               <a:pPr/>
-              <a:t>11/16/2025</a:t>
+              <a:t>11/19/2025</a:t>
             </a:fld>
             <a:endParaRPr lang="en-US"/>
           </a:p>
@@ -1691,7 +1690,7 @@
             <a:fld id="{1D8BD707-D9CF-40AE-B4C6-C98DA3205C09}" type="datetimeFigureOut">
               <a:rPr lang="en-US" smtClean="0"/>
               <a:pPr/>
-              <a:t>11/16/2025</a:t>
+              <a:t>11/19/2025</a:t>
             </a:fld>
             <a:endParaRPr lang="en-US"/>
           </a:p>
@@ -2107,7 +2106,7 @@
             <a:fld id="{1D8BD707-D9CF-40AE-B4C6-C98DA3205C09}" type="datetimeFigureOut">
               <a:rPr lang="en-US" smtClean="0"/>
               <a:pPr/>
-              <a:t>11/16/2025</a:t>
+              <a:t>11/19/2025</a:t>
             </a:fld>
             <a:endParaRPr lang="en-US"/>
           </a:p>
@@ -2221,7 +2220,7 @@
             <a:fld id="{1D8BD707-D9CF-40AE-B4C6-C98DA3205C09}" type="datetimeFigureOut">
               <a:rPr lang="en-US" smtClean="0"/>
               <a:pPr/>
-              <a:t>11/16/2025</a:t>
+              <a:t>11/19/2025</a:t>
             </a:fld>
             <a:endParaRPr lang="en-US"/>
           </a:p>
@@ -2313,7 +2312,7 @@
             <a:fld id="{1D8BD707-D9CF-40AE-B4C6-C98DA3205C09}" type="datetimeFigureOut">
               <a:rPr lang="en-US" smtClean="0"/>
               <a:pPr/>
-              <a:t>11/16/2025</a:t>
+              <a:t>11/19/2025</a:t>
             </a:fld>
             <a:endParaRPr lang="en-US"/>
           </a:p>
@@ -2585,7 +2584,7 @@
             <a:fld id="{1D8BD707-D9CF-40AE-B4C6-C98DA3205C09}" type="datetimeFigureOut">
               <a:rPr lang="en-US" smtClean="0"/>
               <a:pPr/>
-              <a:t>11/16/2025</a:t>
+              <a:t>11/19/2025</a:t>
             </a:fld>
             <a:endParaRPr lang="en-US"/>
           </a:p>
@@ -2834,7 +2833,7 @@
             <a:fld id="{1D8BD707-D9CF-40AE-B4C6-C98DA3205C09}" type="datetimeFigureOut">
               <a:rPr lang="en-US" smtClean="0"/>
               <a:pPr/>
-              <a:t>11/16/2025</a:t>
+              <a:t>11/19/2025</a:t>
             </a:fld>
             <a:endParaRPr lang="en-US"/>
           </a:p>
@@ -3042,7 +3041,7 @@
             <a:fld id="{1D8BD707-D9CF-40AE-B4C6-C98DA3205C09}" type="datetimeFigureOut">
               <a:rPr lang="en-US" smtClean="0"/>
               <a:pPr/>
-              <a:t>11/16/2025</a:t>
+              <a:t>11/19/2025</a:t>
             </a:fld>
             <a:endParaRPr lang="en-US"/>
           </a:p>
@@ -4054,7 +4053,7 @@
                   <a:cs typeface="Times New Roman" panose="02020603050405020304" pitchFamily="18" charset="0"/>
                   <a:sym typeface="Manrope Medium"/>
                 </a:rPr>
-                <a:t>14.11.2021</a:t>
+                <a:t>22.11.2025</a:t>
               </a:r>
               <a:endParaRPr b="1" dirty="0">
                 <a:latin typeface="Times New Roman" panose="02020603050405020304" pitchFamily="18" charset="0"/>
@@ -4105,16 +4104,18 @@
                 <a:buSzPts val="1100"/>
               </a:pPr>
               <a:r>
-                <a:rPr lang="en-GB" b="1" dirty="0">
+                <a:rPr lang="en-US" sz="1800" b="1" i="0" u="none" strike="noStrike" dirty="0">
                   <a:solidFill>
-                    <a:schemeClr val="dk1"/>
+                    <a:srgbClr val="000000"/>
                   </a:solidFill>
+                  <a:effectLst/>
                   <a:latin typeface="Times New Roman" panose="02020603050405020304" pitchFamily="18" charset="0"/>
-                  <a:ea typeface="Manrope Medium"/>
-                  <a:cs typeface="Times New Roman" panose="02020603050405020304" pitchFamily="18" charset="0"/>
-                  <a:sym typeface="Manrope Medium"/>
                 </a:rPr>
-                <a:t>SSBDCE202504011</a:t>
+                <a:t>SSBDCE202504007</a:t>
+              </a:r>
+              <a:r>
+                <a:rPr lang="en-US" dirty="0"/>
+                <a:t> </a:t>
               </a:r>
               <a:endParaRPr b="1" dirty="0">
                 <a:latin typeface="Times New Roman" panose="02020603050405020304" pitchFamily="18" charset="0"/>
@@ -4669,1271 +4670,6 @@
     <p:extLst>
       <p:ext uri="{BB962C8B-B14F-4D97-AF65-F5344CB8AC3E}">
         <p14:creationId xmlns:p14="http://schemas.microsoft.com/office/powerpoint/2010/main" val="2729603880"/>
-      </p:ext>
-    </p:extLst>
-  </p:cSld>
-  <p:clrMapOvr>
-    <a:masterClrMapping/>
-  </p:clrMapOvr>
-</p:sld>
-</file>
-
-<file path=ppt/slides/slide2.xml><?xml version="1.0" encoding="utf-8"?>
-<p:sld xmlns:a="http://schemas.openxmlformats.org/drawingml/2006/main" xmlns:r="http://schemas.openxmlformats.org/officeDocument/2006/relationships" xmlns:p="http://schemas.openxmlformats.org/presentationml/2006/main">
-  <p:cSld>
-    <p:spTree>
-      <p:nvGrpSpPr>
-        <p:cNvPr id="1" name="">
-          <a:extLst>
-            <a:ext uri="{FF2B5EF4-FFF2-40B4-BE49-F238E27FC236}">
-              <a16:creationId xmlns:a16="http://schemas.microsoft.com/office/drawing/2014/main" id="{A4764931-86F4-7C9F-B2BB-560F2A463A6B}"/>
-            </a:ext>
-          </a:extLst>
-        </p:cNvPr>
-        <p:cNvGrpSpPr/>
-        <p:nvPr/>
-      </p:nvGrpSpPr>
-      <p:grpSpPr>
-        <a:xfrm>
-          <a:off x="0" y="0"/>
-          <a:ext cx="0" cy="0"/>
-          <a:chOff x="0" y="0"/>
-          <a:chExt cx="0" cy="0"/>
-        </a:xfrm>
-      </p:grpSpPr>
-      <p:sp>
-        <p:nvSpPr>
-          <p:cNvPr id="2" name="Freeform 2">
-            <a:extLst>
-              <a:ext uri="{FF2B5EF4-FFF2-40B4-BE49-F238E27FC236}">
-                <a16:creationId xmlns:a16="http://schemas.microsoft.com/office/drawing/2014/main" id="{76E6FBCD-6C27-7E02-619A-B2776F692FD2}"/>
-              </a:ext>
-            </a:extLst>
-          </p:cNvPr>
-          <p:cNvSpPr/>
-          <p:nvPr/>
-        </p:nvSpPr>
-        <p:spPr>
-          <a:xfrm>
-            <a:off x="-393700" y="-349250"/>
-            <a:ext cx="10692000" cy="7560000"/>
-          </a:xfrm>
-          <a:custGeom>
-            <a:avLst/>
-            <a:gdLst/>
-            <a:ahLst/>
-            <a:cxnLst/>
-            <a:rect l="l" t="t" r="r" b="b"/>
-            <a:pathLst>
-              <a:path w="10692000" h="7560000">
-                <a:moveTo>
-                  <a:pt x="0" y="0"/>
-                </a:moveTo>
-                <a:lnTo>
-                  <a:pt x="10692000" y="0"/>
-                </a:lnTo>
-                <a:lnTo>
-                  <a:pt x="10692000" y="7560000"/>
-                </a:lnTo>
-                <a:lnTo>
-                  <a:pt x="0" y="7560000"/>
-                </a:lnTo>
-                <a:lnTo>
-                  <a:pt x="0" y="0"/>
-                </a:lnTo>
-                <a:close/>
-              </a:path>
-            </a:pathLst>
-          </a:custGeom>
-          <a:blipFill>
-            <a:blip r:embed="rId2">
-              <a:extLst>
-                <a:ext uri="{BEBA8EAE-BF5A-486C-A8C5-ECC9F3942E4B}">
-                  <a14:imgProps xmlns:a14="http://schemas.microsoft.com/office/drawing/2010/main">
-                    <a14:imgLayer r:embed="rId3">
-                      <a14:imgEffect>
-                        <a14:colorTemperature colorTemp="4700"/>
-                      </a14:imgEffect>
-                    </a14:imgLayer>
-                  </a14:imgProps>
-                </a:ext>
-              </a:extLst>
-            </a:blip>
-            <a:stretch>
-              <a:fillRect l="-1069" t="-22226" r="-1069" b="-22226"/>
-            </a:stretch>
-          </a:blipFill>
-        </p:spPr>
-      </p:sp>
-      <p:sp>
-        <p:nvSpPr>
-          <p:cNvPr id="3" name="Freeform 3">
-            <a:extLst>
-              <a:ext uri="{FF2B5EF4-FFF2-40B4-BE49-F238E27FC236}">
-                <a16:creationId xmlns:a16="http://schemas.microsoft.com/office/drawing/2014/main" id="{A0404BF7-1845-4262-7143-1E869AB360BB}"/>
-              </a:ext>
-            </a:extLst>
-          </p:cNvPr>
-          <p:cNvSpPr/>
-          <p:nvPr/>
-        </p:nvSpPr>
-        <p:spPr>
-          <a:xfrm rot="-5400000">
-            <a:off x="1172299" y="-1915251"/>
-            <a:ext cx="7560001" cy="10692000"/>
-          </a:xfrm>
-          <a:custGeom>
-            <a:avLst/>
-            <a:gdLst/>
-            <a:ahLst/>
-            <a:cxnLst/>
-            <a:rect l="l" t="t" r="r" b="b"/>
-            <a:pathLst>
-              <a:path w="8274830" h="11066206">
-                <a:moveTo>
-                  <a:pt x="0" y="0"/>
-                </a:moveTo>
-                <a:lnTo>
-                  <a:pt x="8274830" y="0"/>
-                </a:lnTo>
-                <a:lnTo>
-                  <a:pt x="8274830" y="11066206"/>
-                </a:lnTo>
-                <a:lnTo>
-                  <a:pt x="0" y="11066206"/>
-                </a:lnTo>
-                <a:lnTo>
-                  <a:pt x="0" y="0"/>
-                </a:lnTo>
-                <a:close/>
-              </a:path>
-            </a:pathLst>
-          </a:custGeom>
-          <a:blipFill>
-            <a:blip r:embed="rId4">
-              <a:alphaModFix amt="5000"/>
-              <a:extLst>
-                <a:ext uri="{96DAC541-7B7A-43D3-8B79-37D633B846F1}">
-                  <asvg:svgBlip xmlns:asvg="http://schemas.microsoft.com/office/drawing/2016/SVG/main" r:embed="rId5"/>
-                </a:ext>
-              </a:extLst>
-            </a:blip>
-            <a:stretch>
-              <a:fillRect/>
-            </a:stretch>
-          </a:blipFill>
-        </p:spPr>
-      </p:sp>
-      <p:sp>
-        <p:nvSpPr>
-          <p:cNvPr id="4" name="Freeform 4">
-            <a:extLst>
-              <a:ext uri="{FF2B5EF4-FFF2-40B4-BE49-F238E27FC236}">
-                <a16:creationId xmlns:a16="http://schemas.microsoft.com/office/drawing/2014/main" id="{8D1AB6D7-DBC7-35A2-8697-93140A231AE4}"/>
-              </a:ext>
-            </a:extLst>
-          </p:cNvPr>
-          <p:cNvSpPr/>
-          <p:nvPr/>
-        </p:nvSpPr>
-        <p:spPr>
-          <a:xfrm>
-            <a:off x="-143308" y="-118133"/>
-            <a:ext cx="10191217" cy="7097766"/>
-          </a:xfrm>
-          <a:custGeom>
-            <a:avLst/>
-            <a:gdLst/>
-            <a:ahLst/>
-            <a:cxnLst/>
-            <a:rect l="l" t="t" r="r" b="b"/>
-            <a:pathLst>
-              <a:path w="10191217" h="7097766">
-                <a:moveTo>
-                  <a:pt x="0" y="0"/>
-                </a:moveTo>
-                <a:lnTo>
-                  <a:pt x="10191216" y="0"/>
-                </a:lnTo>
-                <a:lnTo>
-                  <a:pt x="10191216" y="7097766"/>
-                </a:lnTo>
-                <a:lnTo>
-                  <a:pt x="0" y="7097766"/>
-                </a:lnTo>
-                <a:lnTo>
-                  <a:pt x="0" y="0"/>
-                </a:lnTo>
-                <a:close/>
-              </a:path>
-            </a:pathLst>
-          </a:custGeom>
-          <a:blipFill>
-            <a:blip r:embed="rId6">
-              <a:extLst>
-                <a:ext uri="{96DAC541-7B7A-43D3-8B79-37D633B846F1}">
-                  <asvg:svgBlip xmlns:asvg="http://schemas.microsoft.com/office/drawing/2016/SVG/main" r:embed="rId7"/>
-                </a:ext>
-              </a:extLst>
-            </a:blip>
-            <a:stretch>
-              <a:fillRect/>
-            </a:stretch>
-          </a:blipFill>
-        </p:spPr>
-      </p:sp>
-      <p:sp>
-        <p:nvSpPr>
-          <p:cNvPr id="5" name="AutoShape 5">
-            <a:extLst>
-              <a:ext uri="{FF2B5EF4-FFF2-40B4-BE49-F238E27FC236}">
-                <a16:creationId xmlns:a16="http://schemas.microsoft.com/office/drawing/2014/main" id="{126A9028-3A04-0A9D-4CEE-EF53A531628F}"/>
-              </a:ext>
-            </a:extLst>
-          </p:cNvPr>
-          <p:cNvSpPr/>
-          <p:nvPr/>
-        </p:nvSpPr>
-        <p:spPr>
-          <a:xfrm>
-            <a:off x="1219200" y="3581400"/>
-            <a:ext cx="7620000" cy="0"/>
-          </a:xfrm>
-          <a:prstGeom prst="line">
-            <a:avLst/>
-          </a:prstGeom>
-          <a:ln w="9525" cap="flat">
-            <a:solidFill>
-              <a:srgbClr val="3D3B3A"/>
-            </a:solidFill>
-            <a:prstDash val="solid"/>
-            <a:headEnd type="none" w="sm" len="sm"/>
-            <a:tailEnd type="none" w="sm" len="sm"/>
-          </a:ln>
-        </p:spPr>
-      </p:sp>
-      <p:sp>
-        <p:nvSpPr>
-          <p:cNvPr id="6" name="AutoShape 6">
-            <a:extLst>
-              <a:ext uri="{FF2B5EF4-FFF2-40B4-BE49-F238E27FC236}">
-                <a16:creationId xmlns:a16="http://schemas.microsoft.com/office/drawing/2014/main" id="{EE28AAC3-A98B-6770-FEB0-E6513C7DCB7A}"/>
-              </a:ext>
-            </a:extLst>
-          </p:cNvPr>
-          <p:cNvSpPr/>
-          <p:nvPr/>
-        </p:nvSpPr>
-        <p:spPr>
-          <a:xfrm>
-            <a:off x="202199" y="6053384"/>
-            <a:ext cx="1994552" cy="0"/>
-          </a:xfrm>
-          <a:prstGeom prst="line">
-            <a:avLst/>
-          </a:prstGeom>
-          <a:ln w="9525" cap="flat">
-            <a:solidFill>
-              <a:srgbClr val="3D3B3A"/>
-            </a:solidFill>
-            <a:prstDash val="solid"/>
-            <a:headEnd type="none" w="sm" len="sm"/>
-            <a:tailEnd type="none" w="sm" len="sm"/>
-          </a:ln>
-        </p:spPr>
-      </p:sp>
-      <p:sp>
-        <p:nvSpPr>
-          <p:cNvPr id="9" name="TextBox 9">
-            <a:extLst>
-              <a:ext uri="{FF2B5EF4-FFF2-40B4-BE49-F238E27FC236}">
-                <a16:creationId xmlns:a16="http://schemas.microsoft.com/office/drawing/2014/main" id="{C31ADF7D-6553-0B03-2DAE-0643D47770DE}"/>
-              </a:ext>
-            </a:extLst>
-          </p:cNvPr>
-          <p:cNvSpPr txBox="1"/>
-          <p:nvPr/>
-        </p:nvSpPr>
-        <p:spPr>
-          <a:xfrm>
-            <a:off x="865944" y="449448"/>
-            <a:ext cx="7973256" cy="1379352"/>
-          </a:xfrm>
-          <a:prstGeom prst="rect">
-            <a:avLst/>
-          </a:prstGeom>
-        </p:spPr>
-        <p:txBody>
-          <a:bodyPr wrap="square" lIns="0" tIns="0" rIns="0" bIns="0" rtlCol="0" anchor="t">
-            <a:spAutoFit/>
-          </a:bodyPr>
-          <a:lstStyle/>
-          <a:p>
-            <a:pPr algn="ctr">
-              <a:lnSpc>
-                <a:spcPts val="12319"/>
-              </a:lnSpc>
-            </a:pPr>
-            <a:r>
-              <a:rPr lang="en-US" sz="6600" spc="300" dirty="0">
-                <a:solidFill>
-                  <a:srgbClr val="3D3B3A"/>
-                </a:solidFill>
-                <a:latin typeface="Times New Roman" panose="02020603050405020304" pitchFamily="18" charset="0"/>
-                <a:ea typeface="Crimson Pro"/>
-                <a:cs typeface="Times New Roman" panose="02020603050405020304" pitchFamily="18" charset="0"/>
-                <a:sym typeface="Crimson Pro"/>
-              </a:rPr>
-              <a:t>CERTIFICATE</a:t>
-            </a:r>
-          </a:p>
-        </p:txBody>
-      </p:sp>
-      <p:sp>
-        <p:nvSpPr>
-          <p:cNvPr id="10" name="TextBox 10">
-            <a:extLst>
-              <a:ext uri="{FF2B5EF4-FFF2-40B4-BE49-F238E27FC236}">
-                <a16:creationId xmlns:a16="http://schemas.microsoft.com/office/drawing/2014/main" id="{7B6B70C5-ED29-FC48-22E8-2B040C50A259}"/>
-              </a:ext>
-            </a:extLst>
-          </p:cNvPr>
-          <p:cNvSpPr txBox="1"/>
-          <p:nvPr/>
-        </p:nvSpPr>
-        <p:spPr>
-          <a:xfrm>
-            <a:off x="2741033" y="1798519"/>
-            <a:ext cx="4422537" cy="339651"/>
-          </a:xfrm>
-          <a:prstGeom prst="rect">
-            <a:avLst/>
-          </a:prstGeom>
-        </p:spPr>
-        <p:txBody>
-          <a:bodyPr lIns="0" tIns="0" rIns="0" bIns="0" rtlCol="0" anchor="t">
-            <a:spAutoFit/>
-          </a:bodyPr>
-          <a:lstStyle/>
-          <a:p>
-            <a:pPr algn="ctr">
-              <a:lnSpc>
-                <a:spcPts val="2799"/>
-              </a:lnSpc>
-            </a:pPr>
-            <a:r>
-              <a:rPr lang="en-US" sz="1999" b="1" spc="300" dirty="0">
-                <a:solidFill>
-                  <a:srgbClr val="3D3B3A"/>
-                </a:solidFill>
-                <a:latin typeface="Times New Roman" panose="02020603050405020304" pitchFamily="18" charset="0"/>
-                <a:ea typeface="Open Sans Bold"/>
-                <a:cs typeface="Times New Roman" panose="02020603050405020304" pitchFamily="18" charset="0"/>
-                <a:sym typeface="Open Sans Bold"/>
-              </a:rPr>
-              <a:t>OF COMPLETION</a:t>
-            </a:r>
-          </a:p>
-        </p:txBody>
-      </p:sp>
-      <p:sp>
-        <p:nvSpPr>
-          <p:cNvPr id="11" name="TextBox 11">
-            <a:extLst>
-              <a:ext uri="{FF2B5EF4-FFF2-40B4-BE49-F238E27FC236}">
-                <a16:creationId xmlns:a16="http://schemas.microsoft.com/office/drawing/2014/main" id="{610F67F0-50A1-61A2-A9D5-648C1C947CEB}"/>
-              </a:ext>
-            </a:extLst>
-          </p:cNvPr>
-          <p:cNvSpPr txBox="1"/>
-          <p:nvPr/>
-        </p:nvSpPr>
-        <p:spPr>
-          <a:xfrm>
-            <a:off x="2895600" y="2362201"/>
-            <a:ext cx="3572224" cy="282129"/>
-          </a:xfrm>
-          <a:prstGeom prst="rect">
-            <a:avLst/>
-          </a:prstGeom>
-        </p:spPr>
-        <p:txBody>
-          <a:bodyPr lIns="0" tIns="0" rIns="0" bIns="0" rtlCol="0" anchor="t">
-            <a:spAutoFit/>
-          </a:bodyPr>
-          <a:lstStyle/>
-          <a:p>
-            <a:pPr algn="ctr">
-              <a:lnSpc>
-                <a:spcPts val="2239"/>
-              </a:lnSpc>
-            </a:pPr>
-            <a:r>
-              <a:rPr lang="en-US" sz="2400" i="1" spc="239" dirty="0">
-                <a:solidFill>
-                  <a:srgbClr val="3D3B3A"/>
-                </a:solidFill>
-                <a:latin typeface="Times New Roman" panose="02020603050405020304" pitchFamily="18" charset="0"/>
-                <a:ea typeface="Crimson Pro Italics"/>
-                <a:cs typeface="Times New Roman" panose="02020603050405020304" pitchFamily="18" charset="0"/>
-                <a:sym typeface="Crimson Pro Italics"/>
-              </a:rPr>
-              <a:t>proudly presented to</a:t>
-            </a:r>
-          </a:p>
-        </p:txBody>
-      </p:sp>
-      <p:sp>
-        <p:nvSpPr>
-          <p:cNvPr id="12" name="TextBox 12">
-            <a:extLst>
-              <a:ext uri="{FF2B5EF4-FFF2-40B4-BE49-F238E27FC236}">
-                <a16:creationId xmlns:a16="http://schemas.microsoft.com/office/drawing/2014/main" id="{12A8C5E2-A48E-5EA9-21B5-01A46D97B04C}"/>
-              </a:ext>
-            </a:extLst>
-          </p:cNvPr>
-          <p:cNvSpPr txBox="1"/>
-          <p:nvPr/>
-        </p:nvSpPr>
-        <p:spPr>
-          <a:xfrm>
-            <a:off x="-168708" y="3753453"/>
-            <a:ext cx="9485928" cy="282129"/>
-          </a:xfrm>
-          <a:prstGeom prst="rect">
-            <a:avLst/>
-          </a:prstGeom>
-        </p:spPr>
-        <p:txBody>
-          <a:bodyPr wrap="square" lIns="0" tIns="0" rIns="0" bIns="0" rtlCol="0" anchor="t">
-            <a:spAutoFit/>
-          </a:bodyPr>
-          <a:lstStyle/>
-          <a:p>
-            <a:pPr algn="ctr">
-              <a:lnSpc>
-                <a:spcPts val="2239"/>
-              </a:lnSpc>
-              <a:spcBef>
-                <a:spcPct val="0"/>
-              </a:spcBef>
-            </a:pPr>
-            <a:r>
-              <a:rPr lang="en-US" sz="2000" i="1" spc="239" dirty="0">
-                <a:solidFill>
-                  <a:srgbClr val="3D3B3A"/>
-                </a:solidFill>
-                <a:latin typeface="Times New Roman" panose="02020603050405020304" pitchFamily="18" charset="0"/>
-                <a:ea typeface="Crimson Pro Italics"/>
-                <a:cs typeface="Times New Roman" panose="02020603050405020304" pitchFamily="18" charset="0"/>
-                <a:sym typeface="Crimson Pro Italics"/>
-              </a:rPr>
-              <a:t>For Successfully Completing the Course   </a:t>
-            </a:r>
-          </a:p>
-        </p:txBody>
-      </p:sp>
-      <p:pic>
-        <p:nvPicPr>
-          <p:cNvPr id="19" name="Picture 18" descr="A logo with a flower in the middle">
-            <a:extLst>
-              <a:ext uri="{FF2B5EF4-FFF2-40B4-BE49-F238E27FC236}">
-                <a16:creationId xmlns:a16="http://schemas.microsoft.com/office/drawing/2014/main" id="{BF5E03BA-F900-017F-2B19-98865D0BD057}"/>
-              </a:ext>
-            </a:extLst>
-          </p:cNvPr>
-          <p:cNvPicPr>
-            <a:picLocks noChangeAspect="1"/>
-          </p:cNvPicPr>
-          <p:nvPr/>
-        </p:nvPicPr>
-        <p:blipFill>
-          <a:blip r:embed="rId8"/>
-          <a:stretch>
-            <a:fillRect/>
-          </a:stretch>
-        </p:blipFill>
-        <p:spPr>
-          <a:xfrm>
-            <a:off x="4137650" y="41186"/>
-            <a:ext cx="873215" cy="873215"/>
-          </a:xfrm>
-          <a:prstGeom prst="rect">
-            <a:avLst/>
-          </a:prstGeom>
-        </p:spPr>
-      </p:pic>
-      <p:grpSp>
-        <p:nvGrpSpPr>
-          <p:cNvPr id="43" name="Group 42">
-            <a:extLst>
-              <a:ext uri="{FF2B5EF4-FFF2-40B4-BE49-F238E27FC236}">
-                <a16:creationId xmlns:a16="http://schemas.microsoft.com/office/drawing/2014/main" id="{DC80458B-5FEA-85CA-1E18-B9CEACB53B4A}"/>
-              </a:ext>
-            </a:extLst>
-          </p:cNvPr>
-          <p:cNvGrpSpPr/>
-          <p:nvPr/>
-        </p:nvGrpSpPr>
-        <p:grpSpPr>
-          <a:xfrm>
-            <a:off x="2590800" y="4746044"/>
-            <a:ext cx="4133996" cy="946323"/>
-            <a:chOff x="3134732" y="4822490"/>
-            <a:chExt cx="4133996" cy="946323"/>
-          </a:xfrm>
-        </p:grpSpPr>
-        <p:sp>
-          <p:nvSpPr>
-            <p:cNvPr id="29" name="Google Shape;67;p13">
-              <a:extLst>
-                <a:ext uri="{FF2B5EF4-FFF2-40B4-BE49-F238E27FC236}">
-                  <a16:creationId xmlns:a16="http://schemas.microsoft.com/office/drawing/2014/main" id="{6E368D4C-E42E-4B08-CEE7-FD7BAB5A4812}"/>
-                </a:ext>
-              </a:extLst>
-            </p:cNvPr>
-            <p:cNvSpPr txBox="1"/>
-            <p:nvPr/>
-          </p:nvSpPr>
-          <p:spPr>
-            <a:xfrm>
-              <a:off x="3134732" y="4822490"/>
-              <a:ext cx="1851600" cy="439001"/>
-            </a:xfrm>
-            <a:prstGeom prst="rect">
-              <a:avLst/>
-            </a:prstGeom>
-            <a:noFill/>
-            <a:ln>
-              <a:noFill/>
-            </a:ln>
-          </p:spPr>
-          <p:txBody>
-            <a:bodyPr spcFirstLastPara="1" wrap="square" lIns="91425" tIns="91425" rIns="91425" bIns="91425" anchor="t" anchorCtr="0">
-              <a:spAutoFit/>
-            </a:bodyPr>
-            <a:lstStyle/>
-            <a:p>
-              <a:pPr algn="ctr"/>
-              <a:r>
-                <a:rPr lang="en-GB" b="1" dirty="0">
-                  <a:solidFill>
-                    <a:srgbClr val="1A1A1A"/>
-                  </a:solidFill>
-                  <a:latin typeface="Times New Roman" panose="02020603050405020304" pitchFamily="18" charset="0"/>
-                  <a:ea typeface="Manrope SemiBold"/>
-                  <a:cs typeface="Times New Roman" panose="02020603050405020304" pitchFamily="18" charset="0"/>
-                  <a:sym typeface="Manrope SemiBold"/>
-                </a:rPr>
-                <a:t>Issuing date:</a:t>
-              </a:r>
-              <a:endParaRPr b="1" dirty="0">
-                <a:solidFill>
-                  <a:srgbClr val="1A1A1A"/>
-                </a:solidFill>
-                <a:latin typeface="Times New Roman" panose="02020603050405020304" pitchFamily="18" charset="0"/>
-                <a:ea typeface="Manrope SemiBold"/>
-                <a:cs typeface="Times New Roman" panose="02020603050405020304" pitchFamily="18" charset="0"/>
-                <a:sym typeface="Manrope SemiBold"/>
-              </a:endParaRPr>
-            </a:p>
-          </p:txBody>
-        </p:sp>
-        <p:sp>
-          <p:nvSpPr>
-            <p:cNvPr id="30" name="Google Shape;68;p13">
-              <a:extLst>
-                <a:ext uri="{FF2B5EF4-FFF2-40B4-BE49-F238E27FC236}">
-                  <a16:creationId xmlns:a16="http://schemas.microsoft.com/office/drawing/2014/main" id="{43BE00DD-CA5C-A70B-E553-4DCEADD7071E}"/>
-                </a:ext>
-              </a:extLst>
-            </p:cNvPr>
-            <p:cNvSpPr txBox="1"/>
-            <p:nvPr/>
-          </p:nvSpPr>
-          <p:spPr>
-            <a:xfrm>
-              <a:off x="3169339" y="5329812"/>
-              <a:ext cx="1851600" cy="439001"/>
-            </a:xfrm>
-            <a:prstGeom prst="rect">
-              <a:avLst/>
-            </a:prstGeom>
-            <a:noFill/>
-            <a:ln>
-              <a:noFill/>
-            </a:ln>
-          </p:spPr>
-          <p:txBody>
-            <a:bodyPr spcFirstLastPara="1" wrap="square" lIns="91425" tIns="91425" rIns="91425" bIns="91425" anchor="t" anchorCtr="0">
-              <a:spAutoFit/>
-            </a:bodyPr>
-            <a:lstStyle/>
-            <a:p>
-              <a:pPr algn="ctr"/>
-              <a:r>
-                <a:rPr lang="en-GB" b="1" dirty="0">
-                  <a:solidFill>
-                    <a:srgbClr val="1A1A1A"/>
-                  </a:solidFill>
-                  <a:latin typeface="Times New Roman" panose="02020603050405020304" pitchFamily="18" charset="0"/>
-                  <a:ea typeface="Manrope SemiBold"/>
-                  <a:cs typeface="Times New Roman" panose="02020603050405020304" pitchFamily="18" charset="0"/>
-                  <a:sym typeface="Manrope SemiBold"/>
-                </a:rPr>
-                <a:t>Certificate ID:</a:t>
-              </a:r>
-              <a:endParaRPr b="1" dirty="0">
-                <a:solidFill>
-                  <a:srgbClr val="1A1A1A"/>
-                </a:solidFill>
-                <a:latin typeface="Times New Roman" panose="02020603050405020304" pitchFamily="18" charset="0"/>
-                <a:ea typeface="Manrope SemiBold"/>
-                <a:cs typeface="Times New Roman" panose="02020603050405020304" pitchFamily="18" charset="0"/>
-                <a:sym typeface="Manrope SemiBold"/>
-              </a:endParaRPr>
-            </a:p>
-          </p:txBody>
-        </p:sp>
-        <p:sp>
-          <p:nvSpPr>
-            <p:cNvPr id="31" name="Google Shape;69;p13">
-              <a:extLst>
-                <a:ext uri="{FF2B5EF4-FFF2-40B4-BE49-F238E27FC236}">
-                  <a16:creationId xmlns:a16="http://schemas.microsoft.com/office/drawing/2014/main" id="{DADD0419-B4A4-43D5-806A-1DFD228820D2}"/>
-                </a:ext>
-              </a:extLst>
-            </p:cNvPr>
-            <p:cNvSpPr/>
-            <p:nvPr/>
-          </p:nvSpPr>
-          <p:spPr>
-            <a:xfrm>
-              <a:off x="4792339" y="4989676"/>
-              <a:ext cx="1622100" cy="172950"/>
-            </a:xfrm>
-            <a:prstGeom prst="roundRect">
-              <a:avLst>
-                <a:gd name="adj" fmla="val 16667"/>
-              </a:avLst>
-            </a:prstGeom>
-            <a:noFill/>
-            <a:ln>
-              <a:noFill/>
-            </a:ln>
-          </p:spPr>
-          <p:txBody>
-            <a:bodyPr spcFirstLastPara="1" wrap="square" lIns="91425" tIns="91425" rIns="91425" bIns="91425" anchor="ctr" anchorCtr="0">
-              <a:noAutofit/>
-            </a:bodyPr>
-            <a:lstStyle/>
-            <a:p>
-              <a:pPr algn="ctr"/>
-              <a:r>
-                <a:rPr lang="en-GB" b="1" dirty="0">
-                  <a:latin typeface="Times New Roman" panose="02020603050405020304" pitchFamily="18" charset="0"/>
-                  <a:ea typeface="Manrope Medium"/>
-                  <a:cs typeface="Times New Roman" panose="02020603050405020304" pitchFamily="18" charset="0"/>
-                  <a:sym typeface="Manrope Medium"/>
-                </a:rPr>
-                <a:t>14.11.2021</a:t>
-              </a:r>
-              <a:endParaRPr b="1" dirty="0">
-                <a:latin typeface="Times New Roman" panose="02020603050405020304" pitchFamily="18" charset="0"/>
-                <a:ea typeface="Manrope Medium"/>
-                <a:cs typeface="Times New Roman" panose="02020603050405020304" pitchFamily="18" charset="0"/>
-                <a:sym typeface="Manrope Medium"/>
-              </a:endParaRPr>
-            </a:p>
-          </p:txBody>
-        </p:sp>
-        <p:sp>
-          <p:nvSpPr>
-            <p:cNvPr id="32" name="Google Shape;70;p13">
-              <a:extLst>
-                <a:ext uri="{FF2B5EF4-FFF2-40B4-BE49-F238E27FC236}">
-                  <a16:creationId xmlns:a16="http://schemas.microsoft.com/office/drawing/2014/main" id="{B1B6A257-4CEE-4AC7-AA1C-AF161C630023}"/>
-                </a:ext>
-              </a:extLst>
-            </p:cNvPr>
-            <p:cNvSpPr/>
-            <p:nvPr/>
-          </p:nvSpPr>
-          <p:spPr>
-            <a:xfrm>
-              <a:off x="4944739" y="5467426"/>
-              <a:ext cx="2323989" cy="172950"/>
-            </a:xfrm>
-            <a:prstGeom prst="roundRect">
-              <a:avLst>
-                <a:gd name="adj" fmla="val 16667"/>
-              </a:avLst>
-            </a:prstGeom>
-            <a:noFill/>
-            <a:ln>
-              <a:noFill/>
-            </a:ln>
-          </p:spPr>
-          <p:txBody>
-            <a:bodyPr spcFirstLastPara="1" wrap="square" lIns="91425" tIns="91425" rIns="91425" bIns="91425" anchor="ctr" anchorCtr="0">
-              <a:noAutofit/>
-            </a:bodyPr>
-            <a:lstStyle/>
-            <a:p>
-              <a:pPr lvl="0">
-                <a:buClr>
-                  <a:schemeClr val="dk1"/>
-                </a:buClr>
-                <a:buSzPts val="1100"/>
-              </a:pPr>
-              <a:r>
-                <a:rPr lang="en-GB" b="1" dirty="0">
-                  <a:solidFill>
-                    <a:schemeClr val="dk1"/>
-                  </a:solidFill>
-                  <a:latin typeface="Times New Roman" panose="02020603050405020304" pitchFamily="18" charset="0"/>
-                  <a:ea typeface="Manrope Medium"/>
-                  <a:cs typeface="Times New Roman" panose="02020603050405020304" pitchFamily="18" charset="0"/>
-                  <a:sym typeface="Manrope Medium"/>
-                </a:rPr>
-                <a:t>SSBDCE202504011</a:t>
-              </a:r>
-              <a:endParaRPr b="1" dirty="0">
-                <a:latin typeface="Times New Roman" panose="02020603050405020304" pitchFamily="18" charset="0"/>
-                <a:cs typeface="Times New Roman" panose="02020603050405020304" pitchFamily="18" charset="0"/>
-              </a:endParaRPr>
-            </a:p>
-          </p:txBody>
-        </p:sp>
-      </p:grpSp>
-      <p:sp>
-        <p:nvSpPr>
-          <p:cNvPr id="17" name="Google Shape;62;p13">
-            <a:extLst>
-              <a:ext uri="{FF2B5EF4-FFF2-40B4-BE49-F238E27FC236}">
-                <a16:creationId xmlns:a16="http://schemas.microsoft.com/office/drawing/2014/main" id="{C1FF7043-C2CF-ED75-24AF-C08761F1B429}"/>
-              </a:ext>
-            </a:extLst>
-          </p:cNvPr>
-          <p:cNvSpPr txBox="1"/>
-          <p:nvPr/>
-        </p:nvSpPr>
-        <p:spPr>
-          <a:xfrm>
-            <a:off x="2938266" y="6070025"/>
-            <a:ext cx="4148335" cy="553968"/>
-          </a:xfrm>
-          <a:prstGeom prst="rect">
-            <a:avLst/>
-          </a:prstGeom>
-          <a:noFill/>
-          <a:ln>
-            <a:noFill/>
-          </a:ln>
-        </p:spPr>
-        <p:txBody>
-          <a:bodyPr spcFirstLastPara="1" wrap="square" lIns="91425" tIns="91425" rIns="91425" bIns="91425" anchor="t" anchorCtr="0">
-            <a:spAutoFit/>
-          </a:bodyPr>
-          <a:lstStyle/>
-          <a:p>
-            <a:r>
-              <a:rPr lang="en-GB" sz="2400" b="1" dirty="0">
-                <a:solidFill>
-                  <a:srgbClr val="21295C"/>
-                </a:solidFill>
-                <a:latin typeface="Times New Roman" panose="02020603050405020304" pitchFamily="18" charset="0"/>
-                <a:ea typeface="Manrope SemiBold"/>
-                <a:cs typeface="Times New Roman" panose="02020603050405020304" pitchFamily="18" charset="0"/>
-                <a:sym typeface="Manrope SemiBold"/>
-              </a:rPr>
-              <a:t>Simulation Support BD-SSBD</a:t>
-            </a:r>
-            <a:endParaRPr sz="2400" b="1" dirty="0">
-              <a:solidFill>
-                <a:srgbClr val="21295C"/>
-              </a:solidFill>
-              <a:latin typeface="Times New Roman" panose="02020603050405020304" pitchFamily="18" charset="0"/>
-              <a:ea typeface="Manrope SemiBold"/>
-              <a:cs typeface="Times New Roman" panose="02020603050405020304" pitchFamily="18" charset="0"/>
-              <a:sym typeface="Manrope SemiBold"/>
-            </a:endParaRPr>
-          </a:p>
-        </p:txBody>
-      </p:sp>
-      <p:pic>
-        <p:nvPicPr>
-          <p:cNvPr id="18" name="Picture 17" descr="A logo with a flower in the middle">
-            <a:extLst>
-              <a:ext uri="{FF2B5EF4-FFF2-40B4-BE49-F238E27FC236}">
-                <a16:creationId xmlns:a16="http://schemas.microsoft.com/office/drawing/2014/main" id="{BB8ED5D0-3F7C-8C2A-F60E-0CBA9C30FA5E}"/>
-              </a:ext>
-            </a:extLst>
-          </p:cNvPr>
-          <p:cNvPicPr>
-            <a:picLocks noChangeAspect="1"/>
-          </p:cNvPicPr>
-          <p:nvPr/>
-        </p:nvPicPr>
-        <p:blipFill>
-          <a:blip r:embed="rId8"/>
-          <a:stretch>
-            <a:fillRect/>
-          </a:stretch>
-        </p:blipFill>
-        <p:spPr>
-          <a:xfrm>
-            <a:off x="2589105" y="6165148"/>
-            <a:ext cx="390516" cy="390516"/>
-          </a:xfrm>
-          <a:prstGeom prst="rect">
-            <a:avLst/>
-          </a:prstGeom>
-        </p:spPr>
-      </p:pic>
-      <p:pic>
-        <p:nvPicPr>
-          <p:cNvPr id="20" name="Picture 19" descr="A black text on a white background">
-            <a:extLst>
-              <a:ext uri="{FF2B5EF4-FFF2-40B4-BE49-F238E27FC236}">
-                <a16:creationId xmlns:a16="http://schemas.microsoft.com/office/drawing/2014/main" id="{1FCDC1F2-AA23-223F-12C6-33B58820162A}"/>
-              </a:ext>
-            </a:extLst>
-          </p:cNvPr>
-          <p:cNvPicPr>
-            <a:picLocks noChangeAspect="1"/>
-          </p:cNvPicPr>
-          <p:nvPr/>
-        </p:nvPicPr>
-        <p:blipFill>
-          <a:blip r:embed="rId9">
-            <a:clrChange>
-              <a:clrFrom>
-                <a:srgbClr val="F5FCFC"/>
-              </a:clrFrom>
-              <a:clrTo>
-                <a:srgbClr val="F5FCFC">
-                  <a:alpha val="0"/>
-                </a:srgbClr>
-              </a:clrTo>
-            </a:clrChange>
-            <a:extLst>
-              <a:ext uri="{BEBA8EAE-BF5A-486C-A8C5-ECC9F3942E4B}">
-                <a14:imgProps xmlns:a14="http://schemas.microsoft.com/office/drawing/2010/main">
-                  <a14:imgLayer r:embed="rId10">
-                    <a14:imgEffect>
-                      <a14:colorTemperature colorTemp="5900"/>
-                    </a14:imgEffect>
-                    <a14:imgEffect>
-                      <a14:saturation sat="66000"/>
-                    </a14:imgEffect>
-                    <a14:imgEffect>
-                      <a14:brightnessContrast contrast="-40000"/>
-                    </a14:imgEffect>
-                  </a14:imgLayer>
-                </a14:imgProps>
-              </a:ext>
-            </a:extLst>
-          </a:blip>
-          <a:stretch>
-            <a:fillRect/>
-          </a:stretch>
-        </p:blipFill>
-        <p:spPr>
-          <a:xfrm>
-            <a:off x="172520" y="5308693"/>
-            <a:ext cx="2053910" cy="649047"/>
-          </a:xfrm>
-          <a:prstGeom prst="rect">
-            <a:avLst/>
-          </a:prstGeom>
-        </p:spPr>
-      </p:pic>
-      <p:sp>
-        <p:nvSpPr>
-          <p:cNvPr id="21" name="TextBox 32">
-            <a:extLst>
-              <a:ext uri="{FF2B5EF4-FFF2-40B4-BE49-F238E27FC236}">
-                <a16:creationId xmlns:a16="http://schemas.microsoft.com/office/drawing/2014/main" id="{6DDF1B89-C943-8779-C4A3-2CB5792FC180}"/>
-              </a:ext>
-            </a:extLst>
-          </p:cNvPr>
-          <p:cNvSpPr txBox="1"/>
-          <p:nvPr/>
-        </p:nvSpPr>
-        <p:spPr>
-          <a:xfrm>
-            <a:off x="232090" y="6149031"/>
-            <a:ext cx="1892564" cy="206595"/>
-          </a:xfrm>
-          <a:prstGeom prst="rect">
-            <a:avLst/>
-          </a:prstGeom>
-        </p:spPr>
-        <p:txBody>
-          <a:bodyPr wrap="square" lIns="0" tIns="0" rIns="0" bIns="0" rtlCol="0" anchor="t">
-            <a:spAutoFit/>
-          </a:bodyPr>
-          <a:lstStyle/>
-          <a:p>
-            <a:pPr algn="ctr">
-              <a:lnSpc>
-                <a:spcPts val="1679"/>
-              </a:lnSpc>
-            </a:pPr>
-            <a:r>
-              <a:rPr lang="en-US" sz="1200" b="1" dirty="0">
-                <a:solidFill>
-                  <a:srgbClr val="1D1D1D"/>
-                </a:solidFill>
-                <a:latin typeface="Times New Roman" panose="02020603050405020304" pitchFamily="18" charset="0"/>
-                <a:ea typeface="Poppins Bold"/>
-                <a:cs typeface="Times New Roman" panose="02020603050405020304" pitchFamily="18" charset="0"/>
-                <a:sym typeface="Poppins Bold"/>
-              </a:rPr>
-              <a:t>Sultan Mahmud</a:t>
-            </a:r>
-          </a:p>
-        </p:txBody>
-      </p:sp>
-      <p:sp>
-        <p:nvSpPr>
-          <p:cNvPr id="22" name="TextBox 33">
-            <a:extLst>
-              <a:ext uri="{FF2B5EF4-FFF2-40B4-BE49-F238E27FC236}">
-                <a16:creationId xmlns:a16="http://schemas.microsoft.com/office/drawing/2014/main" id="{362EE290-1C2D-F07B-86B6-D348DE686DB3}"/>
-              </a:ext>
-            </a:extLst>
-          </p:cNvPr>
-          <p:cNvSpPr txBox="1"/>
-          <p:nvPr/>
-        </p:nvSpPr>
-        <p:spPr>
-          <a:xfrm>
-            <a:off x="241036" y="6362035"/>
-            <a:ext cx="1892564" cy="204158"/>
-          </a:xfrm>
-          <a:prstGeom prst="rect">
-            <a:avLst/>
-          </a:prstGeom>
-        </p:spPr>
-        <p:txBody>
-          <a:bodyPr lIns="0" tIns="0" rIns="0" bIns="0" rtlCol="0" anchor="t">
-            <a:spAutoFit/>
-          </a:bodyPr>
-          <a:lstStyle/>
-          <a:p>
-            <a:pPr algn="ctr">
-              <a:lnSpc>
-                <a:spcPts val="1680"/>
-              </a:lnSpc>
-            </a:pPr>
-            <a:r>
-              <a:rPr lang="en-US" sz="1200" b="1" spc="60" dirty="0">
-                <a:solidFill>
-                  <a:srgbClr val="1D1D1D"/>
-                </a:solidFill>
-                <a:latin typeface="Times New Roman" panose="02020603050405020304" pitchFamily="18" charset="0"/>
-                <a:ea typeface="Poppins Bold Italics"/>
-                <a:cs typeface="Times New Roman" panose="02020603050405020304" pitchFamily="18" charset="0"/>
-                <a:sym typeface="Poppins Bold Italics"/>
-              </a:rPr>
-              <a:t>Instructor</a:t>
-            </a:r>
-          </a:p>
-        </p:txBody>
-      </p:sp>
-      <p:sp>
-        <p:nvSpPr>
-          <p:cNvPr id="40" name="AutoShape 6">
-            <a:extLst>
-              <a:ext uri="{FF2B5EF4-FFF2-40B4-BE49-F238E27FC236}">
-                <a16:creationId xmlns:a16="http://schemas.microsoft.com/office/drawing/2014/main" id="{BBB655E5-19CF-D730-2C4F-6CC4C5F5C1F4}"/>
-              </a:ext>
-            </a:extLst>
-          </p:cNvPr>
-          <p:cNvSpPr/>
-          <p:nvPr/>
-        </p:nvSpPr>
-        <p:spPr>
-          <a:xfrm>
-            <a:off x="7543801" y="6052348"/>
-            <a:ext cx="2246315" cy="0"/>
-          </a:xfrm>
-          <a:prstGeom prst="line">
-            <a:avLst/>
-          </a:prstGeom>
-          <a:ln w="9525" cap="flat">
-            <a:solidFill>
-              <a:srgbClr val="3D3B3A"/>
-            </a:solidFill>
-            <a:prstDash val="solid"/>
-            <a:headEnd type="none" w="sm" len="sm"/>
-            <a:tailEnd type="none" w="sm" len="sm"/>
-          </a:ln>
-        </p:spPr>
-      </p:sp>
-      <p:sp>
-        <p:nvSpPr>
-          <p:cNvPr id="41" name="TextBox 32">
-            <a:extLst>
-              <a:ext uri="{FF2B5EF4-FFF2-40B4-BE49-F238E27FC236}">
-                <a16:creationId xmlns:a16="http://schemas.microsoft.com/office/drawing/2014/main" id="{5B8DAE1E-F788-4E89-5F95-CD1A4635C6DF}"/>
-              </a:ext>
-            </a:extLst>
-          </p:cNvPr>
-          <p:cNvSpPr txBox="1"/>
-          <p:nvPr/>
-        </p:nvSpPr>
-        <p:spPr>
-          <a:xfrm>
-            <a:off x="7699690" y="6147995"/>
-            <a:ext cx="1892564" cy="206595"/>
-          </a:xfrm>
-          <a:prstGeom prst="rect">
-            <a:avLst/>
-          </a:prstGeom>
-        </p:spPr>
-        <p:txBody>
-          <a:bodyPr wrap="square" lIns="0" tIns="0" rIns="0" bIns="0" rtlCol="0" anchor="t">
-            <a:spAutoFit/>
-          </a:bodyPr>
-          <a:lstStyle/>
-          <a:p>
-            <a:pPr algn="ctr">
-              <a:lnSpc>
-                <a:spcPts val="1681"/>
-              </a:lnSpc>
-            </a:pPr>
-            <a:r>
-              <a:rPr lang="en-US" sz="1201" b="1" dirty="0">
-                <a:solidFill>
-                  <a:srgbClr val="1D1D1D"/>
-                </a:solidFill>
-                <a:latin typeface="Times New Roman" panose="02020603050405020304" pitchFamily="18" charset="0"/>
-                <a:ea typeface="Poppins Bold"/>
-                <a:cs typeface="Times New Roman" panose="02020603050405020304" pitchFamily="18" charset="0"/>
-                <a:sym typeface="Poppins Bold"/>
-              </a:rPr>
-              <a:t>Md Tasin Rahman Rakib</a:t>
-            </a:r>
-          </a:p>
-        </p:txBody>
-      </p:sp>
-      <p:sp>
-        <p:nvSpPr>
-          <p:cNvPr id="42" name="TextBox 33">
-            <a:extLst>
-              <a:ext uri="{FF2B5EF4-FFF2-40B4-BE49-F238E27FC236}">
-                <a16:creationId xmlns:a16="http://schemas.microsoft.com/office/drawing/2014/main" id="{1E20A8AC-46D0-3470-A32B-DBCF1F210749}"/>
-              </a:ext>
-            </a:extLst>
-          </p:cNvPr>
-          <p:cNvSpPr txBox="1"/>
-          <p:nvPr/>
-        </p:nvSpPr>
-        <p:spPr>
-          <a:xfrm>
-            <a:off x="7708636" y="6360999"/>
-            <a:ext cx="1892564" cy="204158"/>
-          </a:xfrm>
-          <a:prstGeom prst="rect">
-            <a:avLst/>
-          </a:prstGeom>
-        </p:spPr>
-        <p:txBody>
-          <a:bodyPr lIns="0" tIns="0" rIns="0" bIns="0" rtlCol="0" anchor="t">
-            <a:spAutoFit/>
-          </a:bodyPr>
-          <a:lstStyle/>
-          <a:p>
-            <a:pPr algn="ctr">
-              <a:lnSpc>
-                <a:spcPts val="1680"/>
-              </a:lnSpc>
-            </a:pPr>
-            <a:r>
-              <a:rPr lang="en-US" sz="1200" b="1" spc="60" dirty="0">
-                <a:solidFill>
-                  <a:srgbClr val="1D1D1D"/>
-                </a:solidFill>
-                <a:latin typeface="Times New Roman" panose="02020603050405020304" pitchFamily="18" charset="0"/>
-                <a:ea typeface="Poppins Bold Italics"/>
-                <a:cs typeface="Times New Roman" panose="02020603050405020304" pitchFamily="18" charset="0"/>
-                <a:sym typeface="Poppins Bold Italics"/>
-              </a:rPr>
-              <a:t>Assistant Manager</a:t>
-            </a:r>
-          </a:p>
-        </p:txBody>
-      </p:sp>
-      <p:pic>
-        <p:nvPicPr>
-          <p:cNvPr id="44" name="Picture 43">
-            <a:extLst>
-              <a:ext uri="{FF2B5EF4-FFF2-40B4-BE49-F238E27FC236}">
-                <a16:creationId xmlns:a16="http://schemas.microsoft.com/office/drawing/2014/main" id="{2D04F591-1B12-FD47-5EDB-D0F78766E746}"/>
-              </a:ext>
-            </a:extLst>
-          </p:cNvPr>
-          <p:cNvPicPr>
-            <a:picLocks noChangeAspect="1"/>
-          </p:cNvPicPr>
-          <p:nvPr/>
-        </p:nvPicPr>
-        <p:blipFill>
-          <a:blip r:embed="rId11"/>
-          <a:stretch>
-            <a:fillRect/>
-          </a:stretch>
-        </p:blipFill>
-        <p:spPr>
-          <a:xfrm>
-            <a:off x="-1827530" y="990601"/>
-            <a:ext cx="660434" cy="647733"/>
-          </a:xfrm>
-          <a:prstGeom prst="rect">
-            <a:avLst/>
-          </a:prstGeom>
-        </p:spPr>
-      </p:pic>
-      <p:sp>
-        <p:nvSpPr>
-          <p:cNvPr id="45" name="TextBox 10">
-            <a:extLst>
-              <a:ext uri="{FF2B5EF4-FFF2-40B4-BE49-F238E27FC236}">
-                <a16:creationId xmlns:a16="http://schemas.microsoft.com/office/drawing/2014/main" id="{D7FBE1CD-86A2-ED31-7E92-114FB00394EA}"/>
-              </a:ext>
-            </a:extLst>
-          </p:cNvPr>
-          <p:cNvSpPr txBox="1"/>
-          <p:nvPr/>
-        </p:nvSpPr>
-        <p:spPr>
-          <a:xfrm>
-            <a:off x="311437" y="4334870"/>
-            <a:ext cx="9617594" cy="389530"/>
-          </a:xfrm>
-          <a:prstGeom prst="rect">
-            <a:avLst/>
-          </a:prstGeom>
-        </p:spPr>
-        <p:txBody>
-          <a:bodyPr wrap="square" lIns="0" tIns="0" rIns="0" bIns="0" rtlCol="0" anchor="t">
-            <a:spAutoFit/>
-          </a:bodyPr>
-          <a:lstStyle/>
-          <a:p>
-            <a:pPr algn="ctr">
-              <a:lnSpc>
-                <a:spcPts val="2799"/>
-              </a:lnSpc>
-            </a:pPr>
-            <a:r>
-              <a:rPr lang="en-US" sz="4000" b="1" dirty="0">
-                <a:solidFill>
-                  <a:srgbClr val="3D3B3A"/>
-                </a:solidFill>
-                <a:latin typeface="Times New Roman" panose="02020603050405020304" pitchFamily="18" charset="0"/>
-                <a:ea typeface="Open Sans Bold"/>
-                <a:cs typeface="Times New Roman" panose="02020603050405020304" pitchFamily="18" charset="0"/>
-                <a:sym typeface="Open Sans Bold"/>
-              </a:rPr>
-              <a:t>ANSYS Fluent (CFD &amp; Heat Transfer)</a:t>
-            </a:r>
-          </a:p>
-        </p:txBody>
-      </p:sp>
-      <p:pic>
-        <p:nvPicPr>
-          <p:cNvPr id="15" name="Picture 14" descr="A black background with writing&#10;&#10;AI-generated content may be incorrect.">
-            <a:extLst>
-              <a:ext uri="{FF2B5EF4-FFF2-40B4-BE49-F238E27FC236}">
-                <a16:creationId xmlns:a16="http://schemas.microsoft.com/office/drawing/2014/main" id="{64FB93F1-5B7A-8410-A2E7-E32521A26345}"/>
-              </a:ext>
-            </a:extLst>
-          </p:cNvPr>
-          <p:cNvPicPr>
-            <a:picLocks noChangeAspect="1"/>
-          </p:cNvPicPr>
-          <p:nvPr/>
-        </p:nvPicPr>
-        <p:blipFill>
-          <a:blip r:embed="rId12" cstate="print">
-            <a:extLst>
-              <a:ext uri="{28A0092B-C50C-407E-A947-70E740481C1C}">
-                <a14:useLocalDpi xmlns:a14="http://schemas.microsoft.com/office/drawing/2010/main" val="0"/>
-              </a:ext>
-            </a:extLst>
-          </a:blip>
-          <a:stretch>
-            <a:fillRect/>
-          </a:stretch>
-        </p:blipFill>
-        <p:spPr>
-          <a:xfrm>
-            <a:off x="8229600" y="5388644"/>
-            <a:ext cx="847356" cy="635459"/>
-          </a:xfrm>
-          <a:prstGeom prst="rect">
-            <a:avLst/>
-          </a:prstGeom>
-        </p:spPr>
-      </p:pic>
-      <p:sp>
-        <p:nvSpPr>
-          <p:cNvPr id="7" name="TextBox 6">
-            <a:extLst>
-              <a:ext uri="{FF2B5EF4-FFF2-40B4-BE49-F238E27FC236}">
-                <a16:creationId xmlns:a16="http://schemas.microsoft.com/office/drawing/2014/main" id="{F1B0C266-803D-3BED-F02D-2B856CA2521A}"/>
-              </a:ext>
-            </a:extLst>
-          </p:cNvPr>
-          <p:cNvSpPr txBox="1"/>
-          <p:nvPr/>
-        </p:nvSpPr>
-        <p:spPr>
-          <a:xfrm>
-            <a:off x="2784363" y="3110855"/>
-            <a:ext cx="4865434" cy="400110"/>
-          </a:xfrm>
-          <a:prstGeom prst="rect">
-            <a:avLst/>
-          </a:prstGeom>
-          <a:noFill/>
-        </p:spPr>
-        <p:txBody>
-          <a:bodyPr wrap="none" rtlCol="0">
-            <a:spAutoFit/>
-          </a:bodyPr>
-          <a:lstStyle/>
-          <a:p>
-            <a:r>
-              <a:rPr lang="fi-FI" sz="2000" b="1" i="0" u="none" strike="noStrike" dirty="0">
-                <a:solidFill>
-                  <a:srgbClr val="000000"/>
-                </a:solidFill>
-                <a:effectLst/>
-                <a:latin typeface="Slight" panose="00000500000000000000" pitchFamily="2" charset="0"/>
-              </a:rPr>
-              <a:t>A. F. M. Mohaimen Khan</a:t>
-            </a:r>
-            <a:r>
-              <a:rPr lang="fi-FI" sz="2000" dirty="0">
-                <a:latin typeface="Slight" panose="00000500000000000000" pitchFamily="2" charset="0"/>
-              </a:rPr>
-              <a:t> </a:t>
-            </a:r>
-            <a:endParaRPr lang="en-US" sz="2000" dirty="0">
-              <a:latin typeface="Slight" panose="00000500000000000000" pitchFamily="2" charset="0"/>
-            </a:endParaRPr>
-          </a:p>
-        </p:txBody>
-      </p:sp>
-    </p:spTree>
-    <p:extLst>
-      <p:ext uri="{BB962C8B-B14F-4D97-AF65-F5344CB8AC3E}">
-        <p14:creationId xmlns:p14="http://schemas.microsoft.com/office/powerpoint/2010/main" val="470657650"/>
       </p:ext>
     </p:extLst>
   </p:cSld>

--- a/pptx_src/Certificate.pptx
+++ b/pptx_src/Certificate.pptx
@@ -14,7 +14,7 @@
   <p:notesSz cx="6858000" cy="9144000"/>
   <p:embeddedFontLst>
     <p:embeddedFont>
-      <p:font typeface="Slight" panose="00000500000000000000" pitchFamily="2" charset="0"/>
+      <p:font typeface="Slight" panose="020B0604020202020204" charset="0"/>
       <p:regular r:id="rId4"/>
     </p:embeddedFont>
   </p:embeddedFontLst>
@@ -214,7 +214,7 @@
           <a:p>
             <a:fld id="{5D2A3E32-B134-42CF-BF99-9DCA3D02EB99}" type="datetimeFigureOut">
               <a:rPr lang="en-US" smtClean="0"/>
-              <a:t>11/19/2025</a:t>
+              <a:t>2/23/2026</a:t>
             </a:fld>
             <a:endParaRPr lang="en-US"/>
           </a:p>
@@ -661,7 +661,7 @@
             <a:fld id="{1D8BD707-D9CF-40AE-B4C6-C98DA3205C09}" type="datetimeFigureOut">
               <a:rPr lang="en-US" smtClean="0"/>
               <a:pPr/>
-              <a:t>11/19/2025</a:t>
+              <a:t>2/23/2026</a:t>
             </a:fld>
             <a:endParaRPr lang="en-US"/>
           </a:p>
@@ -826,7 +826,7 @@
             <a:fld id="{1D8BD707-D9CF-40AE-B4C6-C98DA3205C09}" type="datetimeFigureOut">
               <a:rPr lang="en-US" smtClean="0"/>
               <a:pPr/>
-              <a:t>11/19/2025</a:t>
+              <a:t>2/23/2026</a:t>
             </a:fld>
             <a:endParaRPr lang="en-US"/>
           </a:p>
@@ -1001,7 +1001,7 @@
             <a:fld id="{1D8BD707-D9CF-40AE-B4C6-C98DA3205C09}" type="datetimeFigureOut">
               <a:rPr lang="en-US" smtClean="0"/>
               <a:pPr/>
-              <a:t>11/19/2025</a:t>
+              <a:t>2/23/2026</a:t>
             </a:fld>
             <a:endParaRPr lang="en-US"/>
           </a:p>
@@ -1166,7 +1166,7 @@
             <a:fld id="{1D8BD707-D9CF-40AE-B4C6-C98DA3205C09}" type="datetimeFigureOut">
               <a:rPr lang="en-US" smtClean="0"/>
               <a:pPr/>
-              <a:t>11/19/2025</a:t>
+              <a:t>2/23/2026</a:t>
             </a:fld>
             <a:endParaRPr lang="en-US"/>
           </a:p>
@@ -1408,7 +1408,7 @@
             <a:fld id="{1D8BD707-D9CF-40AE-B4C6-C98DA3205C09}" type="datetimeFigureOut">
               <a:rPr lang="en-US" smtClean="0"/>
               <a:pPr/>
-              <a:t>11/19/2025</a:t>
+              <a:t>2/23/2026</a:t>
             </a:fld>
             <a:endParaRPr lang="en-US"/>
           </a:p>
@@ -1690,7 +1690,7 @@
             <a:fld id="{1D8BD707-D9CF-40AE-B4C6-C98DA3205C09}" type="datetimeFigureOut">
               <a:rPr lang="en-US" smtClean="0"/>
               <a:pPr/>
-              <a:t>11/19/2025</a:t>
+              <a:t>2/23/2026</a:t>
             </a:fld>
             <a:endParaRPr lang="en-US"/>
           </a:p>
@@ -2106,7 +2106,7 @@
             <a:fld id="{1D8BD707-D9CF-40AE-B4C6-C98DA3205C09}" type="datetimeFigureOut">
               <a:rPr lang="en-US" smtClean="0"/>
               <a:pPr/>
-              <a:t>11/19/2025</a:t>
+              <a:t>2/23/2026</a:t>
             </a:fld>
             <a:endParaRPr lang="en-US"/>
           </a:p>
@@ -2220,7 +2220,7 @@
             <a:fld id="{1D8BD707-D9CF-40AE-B4C6-C98DA3205C09}" type="datetimeFigureOut">
               <a:rPr lang="en-US" smtClean="0"/>
               <a:pPr/>
-              <a:t>11/19/2025</a:t>
+              <a:t>2/23/2026</a:t>
             </a:fld>
             <a:endParaRPr lang="en-US"/>
           </a:p>
@@ -2312,7 +2312,7 @@
             <a:fld id="{1D8BD707-D9CF-40AE-B4C6-C98DA3205C09}" type="datetimeFigureOut">
               <a:rPr lang="en-US" smtClean="0"/>
               <a:pPr/>
-              <a:t>11/19/2025</a:t>
+              <a:t>2/23/2026</a:t>
             </a:fld>
             <a:endParaRPr lang="en-US"/>
           </a:p>
@@ -2584,7 +2584,7 @@
             <a:fld id="{1D8BD707-D9CF-40AE-B4C6-C98DA3205C09}" type="datetimeFigureOut">
               <a:rPr lang="en-US" smtClean="0"/>
               <a:pPr/>
-              <a:t>11/19/2025</a:t>
+              <a:t>2/23/2026</a:t>
             </a:fld>
             <a:endParaRPr lang="en-US"/>
           </a:p>
@@ -2833,7 +2833,7 @@
             <a:fld id="{1D8BD707-D9CF-40AE-B4C6-C98DA3205C09}" type="datetimeFigureOut">
               <a:rPr lang="en-US" smtClean="0"/>
               <a:pPr/>
-              <a:t>11/19/2025</a:t>
+              <a:t>2/23/2026</a:t>
             </a:fld>
             <a:endParaRPr lang="en-US"/>
           </a:p>
@@ -3041,7 +3041,7 @@
             <a:fld id="{1D8BD707-D9CF-40AE-B4C6-C98DA3205C09}" type="datetimeFigureOut">
               <a:rPr lang="en-US" smtClean="0"/>
               <a:pPr/>
-              <a:t>11/19/2025</a:t>
+              <a:t>2/23/2026</a:t>
             </a:fld>
             <a:endParaRPr lang="en-US"/>
           </a:p>
@@ -4111,11 +4111,11 @@
                   <a:effectLst/>
                   <a:latin typeface="Times New Roman" panose="02020603050405020304" pitchFamily="18" charset="0"/>
                 </a:rPr>
-                <a:t>SSBDCE202504007</a:t>
+                <a:t>SSBDCE202504020</a:t>
               </a:r>
               <a:r>
-                <a:rPr lang="en-US" dirty="0"/>
-                <a:t> </a:t>
+                <a:rPr lang="en-US" sz="2000" dirty="0"/>
+                <a:t>  </a:t>
               </a:r>
               <a:endParaRPr b="1" dirty="0">
                 <a:latin typeface="Times New Roman" panose="02020603050405020304" pitchFamily="18" charset="0"/>
@@ -4613,8 +4613,8 @@
         </p:nvSpPr>
         <p:spPr>
           <a:xfrm>
-            <a:off x="2220640" y="3097281"/>
-            <a:ext cx="5897768" cy="400110"/>
+            <a:off x="2979621" y="3097281"/>
+            <a:ext cx="5097578" cy="400110"/>
           </a:xfrm>
           <a:prstGeom prst="rect">
             <a:avLst/>
@@ -4622,44 +4622,24 @@
           <a:noFill/>
         </p:spPr>
         <p:txBody>
-          <a:bodyPr wrap="none" rtlCol="0">
+          <a:bodyPr wrap="square" rtlCol="0">
             <a:spAutoFit/>
           </a:bodyPr>
           <a:lstStyle/>
           <a:p>
             <a:r>
-              <a:rPr lang="en-US" sz="2000" b="1" i="0" u="none" strike="noStrike" dirty="0">
+              <a:rPr lang="en-US" sz="1800" b="1" i="0" u="none" strike="noStrike" dirty="0">
                 <a:solidFill>
                   <a:srgbClr val="000000"/>
                 </a:solidFill>
                 <a:effectLst/>
-                <a:latin typeface="Slight" panose="00000500000000000000" pitchFamily="2" charset="0"/>
+                <a:latin typeface="Slight" panose="020B0604020202020204" charset="0"/>
               </a:rPr>
-              <a:t>A. K. M Mahmud - </a:t>
-            </a:r>
-            <a:r>
-              <a:rPr lang="en-US" sz="2000" b="1" i="0" u="none" strike="noStrike" dirty="0" err="1">
-                <a:solidFill>
-                  <a:srgbClr val="000000"/>
-                </a:solidFill>
-                <a:effectLst/>
-                <a:latin typeface="Slight" panose="00000500000000000000" pitchFamily="2" charset="0"/>
-              </a:rPr>
-              <a:t>Ul</a:t>
-            </a:r>
-            <a:r>
-              <a:rPr lang="en-US" sz="2000" b="1" i="0" u="none" strike="noStrike" dirty="0">
-                <a:solidFill>
-                  <a:srgbClr val="000000"/>
-                </a:solidFill>
-                <a:effectLst/>
-                <a:latin typeface="Slight" panose="00000500000000000000" pitchFamily="2" charset="0"/>
-              </a:rPr>
-              <a:t> - Hasan</a:t>
+              <a:t>Araf Bin Islam Swapnil</a:t>
             </a:r>
             <a:r>
               <a:rPr lang="en-US" sz="2000" dirty="0">
-                <a:latin typeface="Slight" panose="00000500000000000000" pitchFamily="2" charset="0"/>
+                <a:latin typeface="Slight" panose="020B0604020202020204" charset="0"/>
               </a:rPr>
               <a:t> </a:t>
             </a:r>

--- a/pptx_src/Certificate.pptx
+++ b/pptx_src/Certificate.pptx
@@ -4053,7 +4053,7 @@
                   <a:cs typeface="Times New Roman" panose="02020603050405020304" pitchFamily="18" charset="0"/>
                   <a:sym typeface="Manrope Medium"/>
                 </a:rPr>
-                <a:t>22.11.2025</a:t>
+                <a:t>25.02.2026</a:t>
               </a:r>
               <a:endParaRPr b="1" dirty="0">
                 <a:latin typeface="Times New Roman" panose="02020603050405020304" pitchFamily="18" charset="0"/>
@@ -4115,7 +4115,7 @@
               </a:r>
               <a:r>
                 <a:rPr lang="en-US" sz="2000" dirty="0"/>
-                <a:t>  </a:t>
+                <a:t>   </a:t>
               </a:r>
               <a:endParaRPr b="1" dirty="0">
                 <a:latin typeface="Times New Roman" panose="02020603050405020304" pitchFamily="18" charset="0"/>
@@ -4613,7 +4613,7 @@
         </p:nvSpPr>
         <p:spPr>
           <a:xfrm>
-            <a:off x="2979621" y="3097281"/>
+            <a:off x="2895600" y="3129429"/>
             <a:ext cx="5097578" cy="400110"/>
           </a:xfrm>
           <a:prstGeom prst="rect">
@@ -4628,6 +4628,16 @@
           <a:lstStyle/>
           <a:p>
             <a:r>
+              <a:rPr lang="en-US" sz="1800" b="1" i="0" u="none" strike="noStrike" dirty="0" err="1">
+                <a:solidFill>
+                  <a:srgbClr val="000000"/>
+                </a:solidFill>
+                <a:effectLst/>
+                <a:latin typeface="Slight" panose="020B0604020202020204" charset="0"/>
+              </a:rPr>
+              <a:t>Araf</a:t>
+            </a:r>
+            <a:r>
               <a:rPr lang="en-US" sz="1800" b="1" i="0" u="none" strike="noStrike" dirty="0">
                 <a:solidFill>
                   <a:srgbClr val="000000"/>
@@ -4635,7 +4645,7 @@
                 <a:effectLst/>
                 <a:latin typeface="Slight" panose="020B0604020202020204" charset="0"/>
               </a:rPr>
-              <a:t>Araf Bin Islam Swapnil</a:t>
+              <a:t> Bin Islam Swapnil</a:t>
             </a:r>
             <a:r>
               <a:rPr lang="en-US" sz="2000" dirty="0">

--- a/pptx_src/Certificate.pptx
+++ b/pptx_src/Certificate.pptx
@@ -214,7 +214,7 @@
           <a:p>
             <a:fld id="{5D2A3E32-B134-42CF-BF99-9DCA3D02EB99}" type="datetimeFigureOut">
               <a:rPr lang="en-US" smtClean="0"/>
-              <a:t>2/23/2026</a:t>
+              <a:t>3/3/2026</a:t>
             </a:fld>
             <a:endParaRPr lang="en-US"/>
           </a:p>
@@ -661,7 +661,7 @@
             <a:fld id="{1D8BD707-D9CF-40AE-B4C6-C98DA3205C09}" type="datetimeFigureOut">
               <a:rPr lang="en-US" smtClean="0"/>
               <a:pPr/>
-              <a:t>2/23/2026</a:t>
+              <a:t>3/3/2026</a:t>
             </a:fld>
             <a:endParaRPr lang="en-US"/>
           </a:p>
@@ -826,7 +826,7 @@
             <a:fld id="{1D8BD707-D9CF-40AE-B4C6-C98DA3205C09}" type="datetimeFigureOut">
               <a:rPr lang="en-US" smtClean="0"/>
               <a:pPr/>
-              <a:t>2/23/2026</a:t>
+              <a:t>3/3/2026</a:t>
             </a:fld>
             <a:endParaRPr lang="en-US"/>
           </a:p>
@@ -1001,7 +1001,7 @@
             <a:fld id="{1D8BD707-D9CF-40AE-B4C6-C98DA3205C09}" type="datetimeFigureOut">
               <a:rPr lang="en-US" smtClean="0"/>
               <a:pPr/>
-              <a:t>2/23/2026</a:t>
+              <a:t>3/3/2026</a:t>
             </a:fld>
             <a:endParaRPr lang="en-US"/>
           </a:p>
@@ -1166,7 +1166,7 @@
             <a:fld id="{1D8BD707-D9CF-40AE-B4C6-C98DA3205C09}" type="datetimeFigureOut">
               <a:rPr lang="en-US" smtClean="0"/>
               <a:pPr/>
-              <a:t>2/23/2026</a:t>
+              <a:t>3/3/2026</a:t>
             </a:fld>
             <a:endParaRPr lang="en-US"/>
           </a:p>
@@ -1408,7 +1408,7 @@
             <a:fld id="{1D8BD707-D9CF-40AE-B4C6-C98DA3205C09}" type="datetimeFigureOut">
               <a:rPr lang="en-US" smtClean="0"/>
               <a:pPr/>
-              <a:t>2/23/2026</a:t>
+              <a:t>3/3/2026</a:t>
             </a:fld>
             <a:endParaRPr lang="en-US"/>
           </a:p>
@@ -1690,7 +1690,7 @@
             <a:fld id="{1D8BD707-D9CF-40AE-B4C6-C98DA3205C09}" type="datetimeFigureOut">
               <a:rPr lang="en-US" smtClean="0"/>
               <a:pPr/>
-              <a:t>2/23/2026</a:t>
+              <a:t>3/3/2026</a:t>
             </a:fld>
             <a:endParaRPr lang="en-US"/>
           </a:p>
@@ -2106,7 +2106,7 @@
             <a:fld id="{1D8BD707-D9CF-40AE-B4C6-C98DA3205C09}" type="datetimeFigureOut">
               <a:rPr lang="en-US" smtClean="0"/>
               <a:pPr/>
-              <a:t>2/23/2026</a:t>
+              <a:t>3/3/2026</a:t>
             </a:fld>
             <a:endParaRPr lang="en-US"/>
           </a:p>
@@ -2220,7 +2220,7 @@
             <a:fld id="{1D8BD707-D9CF-40AE-B4C6-C98DA3205C09}" type="datetimeFigureOut">
               <a:rPr lang="en-US" smtClean="0"/>
               <a:pPr/>
-              <a:t>2/23/2026</a:t>
+              <a:t>3/3/2026</a:t>
             </a:fld>
             <a:endParaRPr lang="en-US"/>
           </a:p>
@@ -2312,7 +2312,7 @@
             <a:fld id="{1D8BD707-D9CF-40AE-B4C6-C98DA3205C09}" type="datetimeFigureOut">
               <a:rPr lang="en-US" smtClean="0"/>
               <a:pPr/>
-              <a:t>2/23/2026</a:t>
+              <a:t>3/3/2026</a:t>
             </a:fld>
             <a:endParaRPr lang="en-US"/>
           </a:p>
@@ -2584,7 +2584,7 @@
             <a:fld id="{1D8BD707-D9CF-40AE-B4C6-C98DA3205C09}" type="datetimeFigureOut">
               <a:rPr lang="en-US" smtClean="0"/>
               <a:pPr/>
-              <a:t>2/23/2026</a:t>
+              <a:t>3/3/2026</a:t>
             </a:fld>
             <a:endParaRPr lang="en-US"/>
           </a:p>
@@ -2833,7 +2833,7 @@
             <a:fld id="{1D8BD707-D9CF-40AE-B4C6-C98DA3205C09}" type="datetimeFigureOut">
               <a:rPr lang="en-US" smtClean="0"/>
               <a:pPr/>
-              <a:t>2/23/2026</a:t>
+              <a:t>3/3/2026</a:t>
             </a:fld>
             <a:endParaRPr lang="en-US"/>
           </a:p>
@@ -3041,7 +3041,7 @@
             <a:fld id="{1D8BD707-D9CF-40AE-B4C6-C98DA3205C09}" type="datetimeFigureOut">
               <a:rPr lang="en-US" smtClean="0"/>
               <a:pPr/>
-              <a:t>2/23/2026</a:t>
+              <a:t>3/3/2026</a:t>
             </a:fld>
             <a:endParaRPr lang="en-US"/>
           </a:p>
@@ -4104,17 +4104,26 @@
                 <a:buSzPts val="1100"/>
               </a:pPr>
               <a:r>
-                <a:rPr lang="en-US" sz="1800" b="1" i="0" u="none" strike="noStrike" dirty="0">
+                <a:rPr lang="en-US" sz="1800" b="1" i="0" u="none" strike="noStrike">
                   <a:solidFill>
                     <a:srgbClr val="000000"/>
                   </a:solidFill>
                   <a:effectLst/>
                   <a:latin typeface="Times New Roman" panose="02020603050405020304" pitchFamily="18" charset="0"/>
                 </a:rPr>
-                <a:t>SSBDCE202504020</a:t>
+                <a:t>SSBDCE20250402</a:t>
               </a:r>
               <a:r>
-                <a:rPr lang="en-US" sz="2000" dirty="0"/>
+                <a:rPr lang="en-US" sz="1800" b="1" dirty="0">
+                  <a:solidFill>
+                    <a:srgbClr val="000000"/>
+                  </a:solidFill>
+                  <a:latin typeface="Times New Roman" panose="02020603050405020304" pitchFamily="18" charset="0"/>
+                </a:rPr>
+                <a:t>2</a:t>
+              </a:r>
+              <a:r>
+                <a:rPr lang="en-US" sz="2000"/>
                 <a:t>   </a:t>
               </a:r>
               <a:endParaRPr b="1" dirty="0">
@@ -4486,36 +4495,6 @@
           </a:p>
         </p:txBody>
       </p:sp>
-      <p:pic>
-        <p:nvPicPr>
-          <p:cNvPr id="44" name="Picture 43">
-            <a:extLst>
-              <a:ext uri="{FF2B5EF4-FFF2-40B4-BE49-F238E27FC236}">
-                <a16:creationId xmlns:a16="http://schemas.microsoft.com/office/drawing/2014/main" id="{2D04F591-1B12-FD47-5EDB-D0F78766E746}"/>
-              </a:ext>
-            </a:extLst>
-          </p:cNvPr>
-          <p:cNvPicPr>
-            <a:picLocks noChangeAspect="1"/>
-          </p:cNvPicPr>
-          <p:nvPr/>
-        </p:nvPicPr>
-        <p:blipFill>
-          <a:blip r:embed="rId11"/>
-          <a:stretch>
-            <a:fillRect/>
-          </a:stretch>
-        </p:blipFill>
-        <p:spPr>
-          <a:xfrm>
-            <a:off x="-1827530" y="990601"/>
-            <a:ext cx="660434" cy="647733"/>
-          </a:xfrm>
-          <a:prstGeom prst="rect">
-            <a:avLst/>
-          </a:prstGeom>
-        </p:spPr>
-      </p:pic>
       <p:sp>
         <p:nvSpPr>
           <p:cNvPr id="45" name="TextBox 10">
@@ -4578,7 +4557,7 @@
           <p:nvPr/>
         </p:nvPicPr>
         <p:blipFill>
-          <a:blip r:embed="rId12" cstate="print">
+          <a:blip r:embed="rId11" cstate="print">
             <a:extLst>
               <a:ext uri="{28A0092B-C50C-407E-A947-70E740481C1C}">
                 <a14:useLocalDpi xmlns:a14="http://schemas.microsoft.com/office/drawing/2010/main" val="0"/>
@@ -4613,8 +4592,8 @@
         </p:nvSpPr>
         <p:spPr>
           <a:xfrm>
-            <a:off x="2895600" y="3129429"/>
-            <a:ext cx="5097578" cy="400110"/>
+            <a:off x="3575906" y="3077080"/>
+            <a:ext cx="3572224" cy="400110"/>
           </a:xfrm>
           <a:prstGeom prst="rect">
             <a:avLst/>
@@ -4627,6 +4606,16 @@
           </a:bodyPr>
           <a:lstStyle/>
           <a:p>
+            <a:r>
+              <a:rPr lang="en-US" sz="1800" b="1" i="0" u="none" strike="noStrike" dirty="0">
+                <a:solidFill>
+                  <a:srgbClr val="000000"/>
+                </a:solidFill>
+                <a:effectLst/>
+                <a:latin typeface="Slight" panose="020B0604020202020204" charset="0"/>
+              </a:rPr>
+              <a:t>Md </a:t>
+            </a:r>
             <a:r>
               <a:rPr lang="en-US" sz="1800" b="1" i="0" u="none" strike="noStrike" dirty="0" err="1">
                 <a:solidFill>
@@ -4635,7 +4624,7 @@
                 <a:effectLst/>
                 <a:latin typeface="Slight" panose="020B0604020202020204" charset="0"/>
               </a:rPr>
-              <a:t>Araf</a:t>
+              <a:t>Fozle</a:t>
             </a:r>
             <a:r>
               <a:rPr lang="en-US" sz="1800" b="1" i="0" u="none" strike="noStrike" dirty="0">
@@ -4645,7 +4634,7 @@
                 <a:effectLst/>
                 <a:latin typeface="Slight" panose="020B0604020202020204" charset="0"/>
               </a:rPr>
-              <a:t> Bin Islam Swapnil</a:t>
+              <a:t> Rab</a:t>
             </a:r>
             <a:r>
               <a:rPr lang="en-US" sz="2000" dirty="0">
